--- a/docs/BeautyProof_答辩PPT.pptx
+++ b/docs/BeautyProof_答辩PPT.pptx
@@ -3708,7 +3708,7 @@
                           <a:ea typeface="Microsoft YaHei"/>
                           <a:cs typeface="Microsoft YaHei"/>
                         </a:rPr>
-                        <a:t>跨生成器召回（MJ/SD/Flux）</a:t>
+                        <a:t>跨生成器 held-out 召回</a:t>
                       </a:r>
                     </a:p>
                   </a:txBody>
@@ -3733,7 +3733,7 @@
                           <a:ea typeface="Microsoft YaHei"/>
                           <a:cs typeface="Microsoft YaHei"/>
                         </a:rPr>
-                        <a:t>25%（诚实标注，v3 在补）</a:t>
+                        <a:t>25% → 100%（v3 已校准；ImageGen 风格，MJ/SD 内核待验证）</a:t>
                       </a:r>
                     </a:p>
                   </a:txBody>
@@ -6051,7 +6051,7 @@
                 <a:ea typeface="Microsoft YaHei"/>
                 <a:cs typeface="Microsoft YaHei"/>
               </a:rPr>
-              <a:t>● 边界：跨生成器（非即梦）召回仅 25%；AIGC 整图判定在重度滤镜真图上需谨慎。</a:t>
+              <a:t>● 边界：跨生成器已校准至 held-out 100%（ImageGen 风格），MJ/SD/Flux 内核仍待验证；AIGC 整图判定在重度滤镜真图上需谨慎。</a:t>
             </a:r>
           </a:p>
           <a:p>

--- a/docs/BeautyProof_答辩PPT.pptx
+++ b/docs/BeautyProof_答辩PPT.pptx
@@ -25,6 +25,7 @@
     <p:sldId id="273" r:id="rId24"/>
     <p:sldId id="274" r:id="rId25"/>
     <p:sldId id="275" r:id="rId26"/>
+    <p:sldId id="276" r:id="rId27"/>
   </p:sldIdLst>
   <p:sldSz cx="12191695" cy="6858000" type="screen4x3"/>
   <p:notesSz cx="6858000" cy="9144000"/>
@@ -3318,7 +3319,7 @@
                 <a:ea typeface="Microsoft YaHei"/>
                 <a:cs typeface="Microsoft YaHei"/>
               </a:rPr>
-              <a:t>8 件工具 · 三条独立证据轴 · 双检测器级联 94.7% / 自动下架误伤 0 · 108 项测试</a:t>
+              <a:t>9 件工具 · 三条独立证据轴 · 双检测器级联 94.7% / 自动下架误伤 0 · 139 项测试</a:t>
             </a:r>
           </a:p>
         </p:txBody>
@@ -8093,6 +8094,880 @@
                 <a:ea typeface="Microsoft YaHei"/>
                 <a:cs typeface="Microsoft YaHei"/>
               </a:rPr>
+              <a:t>亮点 3 · 模型盲区 → 标识层救回：系统不必有盲区</a:t>
+            </a:r>
+          </a:p>
+        </p:txBody>
+      </p:sp>
+      <p:sp>
+        <p:nvSpPr>
+          <p:cNvPr id="4" name="TextBox 3"/>
+          <p:cNvSpPr txBox="1"/>
+          <p:nvPr/>
+        </p:nvSpPr>
+        <p:spPr>
+          <a:xfrm>
+            <a:off x="521207" y="1042415"/>
+            <a:ext cx="10972800" cy="384048"/>
+          </a:xfrm>
+          <a:prstGeom prst="rect">
+            <a:avLst/>
+          </a:prstGeom>
+          <a:noFill/>
+        </p:spPr>
+        <p:txBody>
+          <a:bodyPr wrap="square" anchor="t" lIns="45720" rIns="45720" tIns="18288" bIns="18288">
+            <a:spAutoFit/>
+          </a:bodyPr>
+          <a:lstStyle/>
+          <a:p>
+            <a:pPr algn="l">
+              <a:lnSpc>
+                <a:spcPct val="112000"/>
+              </a:lnSpc>
+            </a:pPr>
+            <a:r>
+              <a:rPr sz="1350" b="0">
+                <a:solidFill>
+                  <a:srgbClr val="6B7280"/>
+                </a:solidFill>
+                <a:latin typeface="Microsoft YaHei"/>
+                <a:ea typeface="Microsoft YaHei"/>
+                <a:cs typeface="Microsoft YaHei"/>
+              </a:rPr>
+              <a:t>方法严谨性 + 技术创新（第九件工具 ai_label）</a:t>
+            </a:r>
+          </a:p>
+        </p:txBody>
+      </p:sp>
+      <p:graphicFrame>
+        <p:nvGraphicFramePr>
+          <p:cNvPr id="5" name="Table 4"/>
+          <p:cNvGraphicFramePr>
+            <a:graphicFrameLocks noGrp="1"/>
+          </p:cNvGraphicFramePr>
+          <p:nvPr/>
+        </p:nvGraphicFramePr>
+        <p:xfrm>
+          <a:off x="457200" y="1783080"/>
+          <a:ext cx="11247118" cy="2286000"/>
+        </p:xfrm>
+        <a:graphic>
+          <a:graphicData uri="http://schemas.openxmlformats.org/drawingml/2006/table">
+            <a:tbl>
+              <a:tblPr>
+                <a:tableStyleId>{5C22544A-7EE6-4342-B048-85BDC9FD1C3A}</a:tableStyleId>
+              </a:tblPr>
+              <a:tblGrid>
+                <a:gridCol w="1462125"/>
+                <a:gridCol w="7085685"/>
+                <a:gridCol w="2699308"/>
+              </a:tblGrid>
+              <a:tr h="571500">
+                <a:tc>
+                  <a:txBody>
+                    <a:bodyPr wrap="square"/>
+                    <a:lstStyle/>
+                    <a:p>
+                      <a:pPr algn="l"/>
+                      <a:r>
+                        <a:rPr sz="1350" b="1">
+                          <a:solidFill>
+                            <a:srgbClr val="FFFFFF"/>
+                          </a:solidFill>
+                          <a:latin typeface="Microsoft YaHei"/>
+                          <a:ea typeface="Microsoft YaHei"/>
+                          <a:cs typeface="Microsoft YaHei"/>
+                        </a:rPr>
+                        <a:t>环节</a:t>
+                      </a:r>
+                    </a:p>
+                  </a:txBody>
+                  <a:tcPr marL="64008" marR="64008" marT="27432" marB="27432" anchor="ctr">
+                    <a:solidFill>
+                      <a:srgbClr val="121216"/>
+                    </a:solidFill>
+                  </a:tcPr>
+                </a:tc>
+                <a:tc>
+                  <a:txBody>
+                    <a:bodyPr wrap="square"/>
+                    <a:lstStyle/>
+                    <a:p>
+                      <a:pPr algn="ctr"/>
+                      <a:r>
+                        <a:rPr sz="1350" b="1">
+                          <a:solidFill>
+                            <a:srgbClr val="FFFFFF"/>
+                          </a:solidFill>
+                          <a:latin typeface="Microsoft YaHei"/>
+                          <a:ea typeface="Microsoft YaHei"/>
+                          <a:cs typeface="Microsoft YaHei"/>
+                        </a:rPr>
+                        <a:t>发生了什么</a:t>
+                      </a:r>
+                    </a:p>
+                  </a:txBody>
+                  <a:tcPr marL="64008" marR="64008" marT="27432" marB="27432" anchor="ctr">
+                    <a:solidFill>
+                      <a:srgbClr val="121216"/>
+                    </a:solidFill>
+                  </a:tcPr>
+                </a:tc>
+                <a:tc>
+                  <a:txBody>
+                    <a:bodyPr wrap="square"/>
+                    <a:lstStyle/>
+                    <a:p>
+                      <a:pPr algn="ctr"/>
+                      <a:r>
+                        <a:rPr sz="1350" b="1">
+                          <a:solidFill>
+                            <a:srgbClr val="FFFFFF"/>
+                          </a:solidFill>
+                          <a:latin typeface="Microsoft YaHei"/>
+                          <a:ea typeface="Microsoft YaHei"/>
+                          <a:cs typeface="Microsoft YaHei"/>
+                        </a:rPr>
+                        <a:t>数字</a:t>
+                      </a:r>
+                    </a:p>
+                  </a:txBody>
+                  <a:tcPr marL="64008" marR="64008" marT="27432" marB="27432" anchor="ctr">
+                    <a:solidFill>
+                      <a:srgbClr val="121216"/>
+                    </a:solidFill>
+                  </a:tcPr>
+                </a:tc>
+              </a:tr>
+              <a:tr h="571500">
+                <a:tc>
+                  <a:txBody>
+                    <a:bodyPr wrap="square"/>
+                    <a:lstStyle/>
+                    <a:p>
+                      <a:pPr algn="l"/>
+                      <a:r>
+                        <a:rPr sz="1300" b="0">
+                          <a:solidFill>
+                            <a:srgbClr val="1A1A1A"/>
+                          </a:solidFill>
+                          <a:latin typeface="Microsoft YaHei"/>
+                          <a:ea typeface="Microsoft YaHei"/>
+                          <a:cs typeface="Microsoft YaHei"/>
+                        </a:rPr>
+                        <a:t>① 模型层</a:t>
+                      </a:r>
+                    </a:p>
+                  </a:txBody>
+                  <a:tcPr marL="64008" marR="64008" marT="27432" marB="27432" anchor="ctr">
+                    <a:solidFill>
+                      <a:srgbClr val="FFFFFF"/>
+                    </a:solidFill>
+                  </a:tcPr>
+                </a:tc>
+                <a:tc>
+                  <a:txBody>
+                    <a:bodyPr wrap="square"/>
+                    <a:lstStyle/>
+                    <a:p>
+                      <a:pPr algn="ctr"/>
+                      <a:r>
+                        <a:rPr sz="1300" b="0">
+                          <a:solidFill>
+                            <a:srgbClr val="1A1A1A"/>
+                          </a:solidFill>
+                          <a:latin typeface="Microsoft YaHei"/>
+                          <a:ea typeface="Microsoft YaHei"/>
+                          <a:cs typeface="Microsoft YaHei"/>
+                        </a:rPr>
+                        <a:t>12 张全新风格零样本，模型只抓到 9 张；3 张直接输出 0.0 —— 判成「相机实拍」</a:t>
+                      </a:r>
+                    </a:p>
+                  </a:txBody>
+                  <a:tcPr marL="64008" marR="64008" marT="27432" marB="27432" anchor="ctr">
+                    <a:solidFill>
+                      <a:srgbClr val="FFFFFF"/>
+                    </a:solidFill>
+                  </a:tcPr>
+                </a:tc>
+                <a:tc>
+                  <a:txBody>
+                    <a:bodyPr wrap="square"/>
+                    <a:lstStyle/>
+                    <a:p>
+                      <a:pPr algn="ctr"/>
+                      <a:r>
+                        <a:rPr sz="1300" b="0">
+                          <a:solidFill>
+                            <a:srgbClr val="1A1A1A"/>
+                          </a:solidFill>
+                          <a:latin typeface="Microsoft YaHei"/>
+                          <a:ea typeface="Microsoft YaHei"/>
+                          <a:cs typeface="Microsoft YaHei"/>
+                        </a:rPr>
+                        <a:t>9 / 12 = 75%</a:t>
+                      </a:r>
+                    </a:p>
+                  </a:txBody>
+                  <a:tcPr marL="64008" marR="64008" marT="27432" marB="27432" anchor="ctr">
+                    <a:solidFill>
+                      <a:srgbClr val="FFFFFF"/>
+                    </a:solidFill>
+                  </a:tcPr>
+                </a:tc>
+              </a:tr>
+              <a:tr h="571500">
+                <a:tc>
+                  <a:txBody>
+                    <a:bodyPr wrap="square"/>
+                    <a:lstStyle/>
+                    <a:p>
+                      <a:pPr algn="l"/>
+                      <a:r>
+                        <a:rPr sz="1300" b="0">
+                          <a:solidFill>
+                            <a:srgbClr val="1A1A1A"/>
+                          </a:solidFill>
+                          <a:latin typeface="Microsoft YaHei"/>
+                          <a:ea typeface="Microsoft YaHei"/>
+                          <a:cs typeface="Microsoft YaHei"/>
+                        </a:rPr>
+                        <a:t>② 图上自证</a:t>
+                      </a:r>
+                    </a:p>
+                  </a:txBody>
+                  <a:tcPr marL="64008" marR="64008" marT="27432" marB="27432" anchor="ctr">
+                    <a:solidFill>
+                      <a:srgbClr val="F4F1EC"/>
+                    </a:solidFill>
+                  </a:tcPr>
+                </a:tc>
+                <a:tc>
+                  <a:txBody>
+                    <a:bodyPr wrap="square"/>
+                    <a:lstStyle/>
+                    <a:p>
+                      <a:pPr algn="ctr"/>
+                      <a:r>
+                        <a:rPr sz="1300" b="0">
+                          <a:solidFill>
+                            <a:srgbClr val="1A1A1A"/>
+                          </a:solidFill>
+                          <a:latin typeface="Microsoft YaHei"/>
+                          <a:ea typeface="Microsoft YaHei"/>
+                          <a:cs typeface="Microsoft YaHei"/>
+                        </a:rPr>
+                        <a:t>3 张漏检图右下角都带平台自动打的「AI生成」标识，OCR 抄写置信度 0.95 ~ 0.995</a:t>
+                      </a:r>
+                    </a:p>
+                  </a:txBody>
+                  <a:tcPr marL="64008" marR="64008" marT="27432" marB="27432" anchor="ctr">
+                    <a:solidFill>
+                      <a:srgbClr val="F4F1EC"/>
+                    </a:solidFill>
+                  </a:tcPr>
+                </a:tc>
+                <a:tc>
+                  <a:txBody>
+                    <a:bodyPr wrap="square"/>
+                    <a:lstStyle/>
+                    <a:p>
+                      <a:pPr algn="ctr"/>
+                      <a:r>
+                        <a:rPr sz="1300" b="0">
+                          <a:solidFill>
+                            <a:srgbClr val="1A1A1A"/>
+                          </a:solidFill>
+                          <a:latin typeface="Microsoft YaHei"/>
+                          <a:ea typeface="Microsoft YaHei"/>
+                          <a:cs typeface="Microsoft YaHei"/>
+                        </a:rPr>
+                        <a:t>3 / 3 命中</a:t>
+                      </a:r>
+                    </a:p>
+                  </a:txBody>
+                  <a:tcPr marL="64008" marR="64008" marT="27432" marB="27432" anchor="ctr">
+                    <a:solidFill>
+                      <a:srgbClr val="F4F1EC"/>
+                    </a:solidFill>
+                  </a:tcPr>
+                </a:tc>
+              </a:tr>
+              <a:tr h="571500">
+                <a:tc>
+                  <a:txBody>
+                    <a:bodyPr wrap="square"/>
+                    <a:lstStyle/>
+                    <a:p>
+                      <a:pPr algn="l"/>
+                      <a:r>
+                        <a:rPr sz="1300" b="0">
+                          <a:solidFill>
+                            <a:srgbClr val="1A1A1A"/>
+                          </a:solidFill>
+                          <a:latin typeface="Microsoft YaHei"/>
+                          <a:ea typeface="Microsoft YaHei"/>
+                          <a:cs typeface="Microsoft YaHei"/>
+                        </a:rPr>
+                        <a:t>③ 系统层</a:t>
+                      </a:r>
+                    </a:p>
+                  </a:txBody>
+                  <a:tcPr marL="64008" marR="64008" marT="27432" marB="27432" anchor="ctr">
+                    <a:solidFill>
+                      <a:srgbClr val="FFFFFF"/>
+                    </a:solidFill>
+                  </a:tcPr>
+                </a:tc>
+                <a:tc>
+                  <a:txBody>
+                    <a:bodyPr wrap="square"/>
+                    <a:lstStyle/>
+                    <a:p>
+                      <a:pPr algn="ctr"/>
+                      <a:r>
+                        <a:rPr sz="1300" b="0">
+                          <a:solidFill>
+                            <a:srgbClr val="1A1A1A"/>
+                          </a:solidFill>
+                          <a:latin typeface="Microsoft YaHei"/>
+                          <a:ea typeface="Microsoft YaHei"/>
+                          <a:cs typeface="Microsoft YaHei"/>
+                        </a:rPr>
+                        <a:t>端到端重跑：inconclusive → high_risk，理由写进报告（标识文字 + 坐标 + 置信度）</a:t>
+                      </a:r>
+                    </a:p>
+                  </a:txBody>
+                  <a:tcPr marL="64008" marR="64008" marT="27432" marB="27432" anchor="ctr">
+                    <a:solidFill>
+                      <a:srgbClr val="FFFFFF"/>
+                    </a:solidFill>
+                  </a:tcPr>
+                </a:tc>
+                <a:tc>
+                  <a:txBody>
+                    <a:bodyPr wrap="square"/>
+                    <a:lstStyle/>
+                    <a:p>
+                      <a:pPr algn="ctr"/>
+                      <a:r>
+                        <a:rPr sz="1300" b="0">
+                          <a:solidFill>
+                            <a:srgbClr val="1A1A1A"/>
+                          </a:solidFill>
+                          <a:latin typeface="Microsoft YaHei"/>
+                          <a:ea typeface="Microsoft YaHei"/>
+                          <a:cs typeface="Microsoft YaHei"/>
+                        </a:rPr>
+                        <a:t>12 / 12 = 100%</a:t>
+                      </a:r>
+                    </a:p>
+                  </a:txBody>
+                  <a:tcPr marL="64008" marR="64008" marT="27432" marB="27432" anchor="ctr">
+                    <a:solidFill>
+                      <a:srgbClr val="FFFFFF"/>
+                    </a:solidFill>
+                  </a:tcPr>
+                </a:tc>
+              </a:tr>
+            </a:tbl>
+          </a:graphicData>
+        </a:graphic>
+      </p:graphicFrame>
+      <p:sp>
+        <p:nvSpPr>
+          <p:cNvPr id="6" name="Rounded Rectangle 5"/>
+          <p:cNvSpPr/>
+          <p:nvPr/>
+        </p:nvSpPr>
+        <p:spPr>
+          <a:xfrm>
+            <a:off x="457200" y="4343400"/>
+            <a:ext cx="5486400" cy="1051560"/>
+          </a:xfrm>
+          <a:prstGeom prst="roundRect">
+            <a:avLst/>
+          </a:prstGeom>
+          <a:solidFill>
+            <a:srgbClr val="F4F1EC"/>
+          </a:solidFill>
+          <a:ln>
+            <a:noFill/>
+          </a:ln>
+          <a:effectLst/>
+        </p:spPr>
+        <p:style>
+          <a:lnRef idx="1">
+            <a:schemeClr val="accent1"/>
+          </a:lnRef>
+          <a:fillRef idx="3">
+            <a:schemeClr val="accent1"/>
+          </a:fillRef>
+          <a:effectRef idx="2">
+            <a:schemeClr val="accent1"/>
+          </a:effectRef>
+          <a:fontRef idx="minor">
+            <a:schemeClr val="lt1"/>
+          </a:fontRef>
+        </p:style>
+        <p:txBody>
+          <a:bodyPr rtlCol="0" anchor="ctr"/>
+          <a:lstStyle/>
+          <a:p>
+            <a:pPr algn="ctr"/>
+          </a:p>
+        </p:txBody>
+      </p:sp>
+      <p:sp>
+        <p:nvSpPr>
+          <p:cNvPr id="7" name="Rounded Rectangle 6"/>
+          <p:cNvSpPr/>
+          <p:nvPr/>
+        </p:nvSpPr>
+        <p:spPr>
+          <a:xfrm>
+            <a:off x="457200" y="4343400"/>
+            <a:ext cx="82296" cy="1051560"/>
+          </a:xfrm>
+          <a:prstGeom prst="roundRect">
+            <a:avLst/>
+          </a:prstGeom>
+          <a:solidFill>
+            <a:srgbClr val="C8A24B"/>
+          </a:solidFill>
+          <a:ln>
+            <a:noFill/>
+          </a:ln>
+          <a:effectLst/>
+        </p:spPr>
+        <p:style>
+          <a:lnRef idx="1">
+            <a:schemeClr val="accent1"/>
+          </a:lnRef>
+          <a:fillRef idx="3">
+            <a:schemeClr val="accent1"/>
+          </a:fillRef>
+          <a:effectRef idx="2">
+            <a:schemeClr val="accent1"/>
+          </a:effectRef>
+          <a:fontRef idx="minor">
+            <a:schemeClr val="lt1"/>
+          </a:fontRef>
+        </p:style>
+        <p:txBody>
+          <a:bodyPr rtlCol="0" anchor="ctr"/>
+          <a:lstStyle/>
+          <a:p>
+            <a:pPr algn="ctr"/>
+          </a:p>
+        </p:txBody>
+      </p:sp>
+      <p:sp>
+        <p:nvSpPr>
+          <p:cNvPr id="8" name="TextBox 7"/>
+          <p:cNvSpPr txBox="1"/>
+          <p:nvPr/>
+        </p:nvSpPr>
+        <p:spPr>
+          <a:xfrm>
+            <a:off x="658368" y="4416552"/>
+            <a:ext cx="5175504" cy="905256"/>
+          </a:xfrm>
+          <a:prstGeom prst="rect">
+            <a:avLst/>
+          </a:prstGeom>
+          <a:noFill/>
+        </p:spPr>
+        <p:txBody>
+          <a:bodyPr wrap="square" anchor="ctr" lIns="45720" rIns="45720" tIns="18288" bIns="18288">
+            <a:spAutoFit/>
+          </a:bodyPr>
+          <a:lstStyle/>
+          <a:p>
+            <a:pPr algn="l">
+              <a:lnSpc>
+                <a:spcPct val="112000"/>
+              </a:lnSpc>
+            </a:pPr>
+            <a:r>
+              <a:rPr sz="1350" b="0">
+                <a:solidFill>
+                  <a:srgbClr val="1A1A1A"/>
+                </a:solidFill>
+                <a:latin typeface="Microsoft YaHei"/>
+                <a:ea typeface="Microsoft YaHei"/>
+                <a:cs typeface="Microsoft YaHei"/>
+              </a:rPr>
+              <a:t>为什么能单独定 high_risk：</a:t>
+            </a:r>
+          </a:p>
+          <a:p>
+            <a:pPr algn="l">
+              <a:lnSpc>
+                <a:spcPct val="112000"/>
+              </a:lnSpc>
+            </a:pPr>
+            <a:r>
+              <a:rPr sz="1350" b="0">
+                <a:solidFill>
+                  <a:srgbClr val="1A1A1A"/>
+                </a:solidFill>
+                <a:latin typeface="Microsoft YaHei"/>
+                <a:ea typeface="Microsoft YaHei"/>
+                <a:cs typeface="Microsoft YaHei"/>
+              </a:rPr>
+              <a:t>它不是「某个分数偏高」，而是图上自证 ——</a:t>
+            </a:r>
+          </a:p>
+          <a:p>
+            <a:pPr algn="l">
+              <a:lnSpc>
+                <a:spcPct val="112000"/>
+              </a:lnSpc>
+            </a:pPr>
+            <a:r>
+              <a:rPr sz="1350" b="0">
+                <a:solidFill>
+                  <a:srgbClr val="1A1A1A"/>
+                </a:solidFill>
+                <a:latin typeface="Microsoft YaHei"/>
+                <a:ea typeface="Microsoft YaHei"/>
+                <a:cs typeface="Microsoft YaHei"/>
+              </a:rPr>
+              <a:t>相机直出的真实照片不会有这种字样。</a:t>
+            </a:r>
+          </a:p>
+        </p:txBody>
+      </p:sp>
+      <p:sp>
+        <p:nvSpPr>
+          <p:cNvPr id="9" name="Rounded Rectangle 8"/>
+          <p:cNvSpPr/>
+          <p:nvPr/>
+        </p:nvSpPr>
+        <p:spPr>
+          <a:xfrm>
+            <a:off x="6172200" y="4343400"/>
+            <a:ext cx="5532120" cy="1051560"/>
+          </a:xfrm>
+          <a:prstGeom prst="roundRect">
+            <a:avLst/>
+          </a:prstGeom>
+          <a:solidFill>
+            <a:srgbClr val="1E1E24"/>
+          </a:solidFill>
+          <a:ln>
+            <a:noFill/>
+          </a:ln>
+          <a:effectLst/>
+        </p:spPr>
+        <p:style>
+          <a:lnRef idx="1">
+            <a:schemeClr val="accent1"/>
+          </a:lnRef>
+          <a:fillRef idx="3">
+            <a:schemeClr val="accent1"/>
+          </a:fillRef>
+          <a:effectRef idx="2">
+            <a:schemeClr val="accent1"/>
+          </a:effectRef>
+          <a:fontRef idx="minor">
+            <a:schemeClr val="lt1"/>
+          </a:fontRef>
+        </p:style>
+        <p:txBody>
+          <a:bodyPr rtlCol="0" anchor="ctr"/>
+          <a:lstStyle/>
+          <a:p>
+            <a:pPr algn="ctr"/>
+          </a:p>
+        </p:txBody>
+      </p:sp>
+      <p:sp>
+        <p:nvSpPr>
+          <p:cNvPr id="10" name="Rounded Rectangle 9"/>
+          <p:cNvSpPr/>
+          <p:nvPr/>
+        </p:nvSpPr>
+        <p:spPr>
+          <a:xfrm>
+            <a:off x="6172200" y="4343400"/>
+            <a:ext cx="82296" cy="1051560"/>
+          </a:xfrm>
+          <a:prstGeom prst="roundRect">
+            <a:avLst/>
+          </a:prstGeom>
+          <a:solidFill>
+            <a:srgbClr val="3FA56B"/>
+          </a:solidFill>
+          <a:ln>
+            <a:noFill/>
+          </a:ln>
+          <a:effectLst/>
+        </p:spPr>
+        <p:style>
+          <a:lnRef idx="1">
+            <a:schemeClr val="accent1"/>
+          </a:lnRef>
+          <a:fillRef idx="3">
+            <a:schemeClr val="accent1"/>
+          </a:fillRef>
+          <a:effectRef idx="2">
+            <a:schemeClr val="accent1"/>
+          </a:effectRef>
+          <a:fontRef idx="minor">
+            <a:schemeClr val="lt1"/>
+          </a:fontRef>
+        </p:style>
+        <p:txBody>
+          <a:bodyPr rtlCol="0" anchor="ctr"/>
+          <a:lstStyle/>
+          <a:p>
+            <a:pPr algn="ctr"/>
+          </a:p>
+        </p:txBody>
+      </p:sp>
+      <p:sp>
+        <p:nvSpPr>
+          <p:cNvPr id="11" name="TextBox 10"/>
+          <p:cNvSpPr txBox="1"/>
+          <p:nvPr/>
+        </p:nvSpPr>
+        <p:spPr>
+          <a:xfrm>
+            <a:off x="6373368" y="4416552"/>
+            <a:ext cx="5221224" cy="905256"/>
+          </a:xfrm>
+          <a:prstGeom prst="rect">
+            <a:avLst/>
+          </a:prstGeom>
+          <a:noFill/>
+        </p:spPr>
+        <p:txBody>
+          <a:bodyPr wrap="square" anchor="ctr" lIns="45720" rIns="45720" tIns="18288" bIns="18288">
+            <a:spAutoFit/>
+          </a:bodyPr>
+          <a:lstStyle/>
+          <a:p>
+            <a:pPr algn="l">
+              <a:lnSpc>
+                <a:spcPct val="112000"/>
+              </a:lnSpc>
+            </a:pPr>
+            <a:r>
+              <a:rPr sz="1350" b="0">
+                <a:solidFill>
+                  <a:srgbClr val="FFFFFF"/>
+                </a:solidFill>
+                <a:latin typeface="Microsoft YaHei"/>
+                <a:ea typeface="Microsoft YaHei"/>
+                <a:cs typeface="Microsoft YaHei"/>
+              </a:rPr>
+              <a:t>边际成本 1.7 秒：复用 ocr_tool 已落盘的</a:t>
+            </a:r>
+          </a:p>
+          <a:p>
+            <a:pPr algn="l">
+              <a:lnSpc>
+                <a:spcPct val="112000"/>
+              </a:lnSpc>
+            </a:pPr>
+            <a:r>
+              <a:rPr sz="1350" b="0">
+                <a:solidFill>
+                  <a:srgbClr val="FFFFFF"/>
+                </a:solidFill>
+                <a:latin typeface="Microsoft YaHei"/>
+                <a:ea typeface="Microsoft YaHei"/>
+                <a:cs typeface="Microsoft YaHei"/>
+              </a:rPr>
+              <a:t>文本行做二次分析，不重跑 PaddleOCR ——</a:t>
+            </a:r>
+          </a:p>
+          <a:p>
+            <a:pPr algn="l">
+              <a:lnSpc>
+                <a:spcPct val="112000"/>
+              </a:lnSpc>
+            </a:pPr>
+            <a:r>
+              <a:rPr sz="1350" b="0">
+                <a:solidFill>
+                  <a:srgbClr val="FFFFFF"/>
+                </a:solidFill>
+                <a:latin typeface="Microsoft YaHei"/>
+                <a:ea typeface="Microsoft YaHei"/>
+                <a:cs typeface="Microsoft YaHei"/>
+              </a:rPr>
+              <a:t>这是「工具编排有价值」的具体例子。</a:t>
+            </a:r>
+          </a:p>
+        </p:txBody>
+      </p:sp>
+      <p:sp>
+        <p:nvSpPr>
+          <p:cNvPr id="12" name="TextBox 11"/>
+          <p:cNvSpPr txBox="1"/>
+          <p:nvPr/>
+        </p:nvSpPr>
+        <p:spPr>
+          <a:xfrm>
+            <a:off x="502920" y="5577840"/>
+            <a:ext cx="11155680" cy="1097280"/>
+          </a:xfrm>
+          <a:prstGeom prst="rect">
+            <a:avLst/>
+          </a:prstGeom>
+          <a:noFill/>
+        </p:spPr>
+        <p:txBody>
+          <a:bodyPr wrap="square">
+            <a:spAutoFit/>
+          </a:bodyPr>
+          <a:lstStyle/>
+          <a:p>
+            <a:pPr>
+              <a:lnSpc>
+                <a:spcPct val="108000"/>
+              </a:lnSpc>
+              <a:spcAft>
+                <a:spcPts val="700"/>
+              </a:spcAft>
+            </a:pPr>
+            <a:r>
+              <a:rPr sz="1250">
+                <a:solidFill>
+                  <a:srgbClr val="1A1A1A"/>
+                </a:solidFill>
+                <a:latin typeface="Microsoft YaHei"/>
+                <a:ea typeface="Microsoft YaHei"/>
+                <a:cs typeface="Microsoft YaHei"/>
+              </a:rPr>
+              <a:t>● 诚实边界：标识可被伪造/贴图；洗掉标识再发布的 AI 图本工具发现不了 —— 标识层是补偿，不是替代，那类图仍靠 AIGC + 频域 + TruFor。</a:t>
+            </a:r>
+          </a:p>
+          <a:p>
+            <a:pPr>
+              <a:lnSpc>
+                <a:spcPct val="108000"/>
+              </a:lnSpc>
+              <a:spcAft>
+                <a:spcPts val="700"/>
+              </a:spcAft>
+            </a:pPr>
+            <a:r>
+              <a:rPr sz="1250">
+                <a:solidFill>
+                  <a:srgbClr val="1A1A1A"/>
+                </a:solidFill>
+                <a:latin typeface="Microsoft YaHei"/>
+                <a:ea typeface="Microsoft YaHei"/>
+                <a:cs typeface="Microsoft YaHei"/>
+              </a:rPr>
+              <a:t>● 评测协议：新图只做 held-out、绝不进训练；跑前 pin 住 v4 并断言解析目录名；未跑/缺图记 missing_files 不进分母（results/ai_label_rescue.json）。</a:t>
+            </a:r>
+          </a:p>
+        </p:txBody>
+      </p:sp>
+    </p:spTree>
+  </p:cSld>
+  <p:clrMapOvr>
+    <a:masterClrMapping/>
+  </p:clrMapOvr>
+</p:sld>
+</file>
+
+<file path=ppt/slides/slide15.xml><?xml version="1.0" encoding="utf-8"?>
+<p:sld xmlns:a="http://schemas.openxmlformats.org/drawingml/2006/main" xmlns:p="http://schemas.openxmlformats.org/presentationml/2006/main" xmlns:r="http://schemas.openxmlformats.org/officeDocument/2006/relationships">
+  <p:cSld>
+    <p:spTree>
+      <p:nvGrpSpPr>
+        <p:cNvPr id="1" name=""/>
+        <p:cNvGrpSpPr/>
+        <p:nvPr/>
+      </p:nvGrpSpPr>
+      <p:grpSpPr/>
+      <p:sp>
+        <p:nvSpPr>
+          <p:cNvPr id="2" name="Rounded Rectangle 1"/>
+          <p:cNvSpPr/>
+          <p:nvPr/>
+        </p:nvSpPr>
+        <p:spPr>
+          <a:xfrm>
+            <a:off x="0" y="0"/>
+            <a:ext cx="201168" cy="6858000"/>
+          </a:xfrm>
+          <a:prstGeom prst="roundRect">
+            <a:avLst/>
+          </a:prstGeom>
+          <a:solidFill>
+            <a:srgbClr val="C8A24B"/>
+          </a:solidFill>
+          <a:ln>
+            <a:noFill/>
+          </a:ln>
+          <a:effectLst/>
+        </p:spPr>
+        <p:style>
+          <a:lnRef idx="1">
+            <a:schemeClr val="accent1"/>
+          </a:lnRef>
+          <a:fillRef idx="3">
+            <a:schemeClr val="accent1"/>
+          </a:fillRef>
+          <a:effectRef idx="2">
+            <a:schemeClr val="accent1"/>
+          </a:effectRef>
+          <a:fontRef idx="minor">
+            <a:schemeClr val="lt1"/>
+          </a:fontRef>
+        </p:style>
+        <p:txBody>
+          <a:bodyPr rtlCol="0" anchor="ctr"/>
+          <a:lstStyle/>
+          <a:p>
+            <a:pPr algn="ctr"/>
+          </a:p>
+        </p:txBody>
+      </p:sp>
+      <p:sp>
+        <p:nvSpPr>
+          <p:cNvPr id="3" name="TextBox 2"/>
+          <p:cNvSpPr txBox="1"/>
+          <p:nvPr/>
+        </p:nvSpPr>
+        <p:spPr>
+          <a:xfrm>
+            <a:off x="502920" y="347472"/>
+            <a:ext cx="11155680" cy="731520"/>
+          </a:xfrm>
+          <a:prstGeom prst="rect">
+            <a:avLst/>
+          </a:prstGeom>
+          <a:noFill/>
+        </p:spPr>
+        <p:txBody>
+          <a:bodyPr wrap="square" anchor="t" lIns="45720" rIns="45720" tIns="18288" bIns="18288">
+            <a:spAutoFit/>
+          </a:bodyPr>
+          <a:lstStyle/>
+          <a:p>
+            <a:pPr algn="l">
+              <a:lnSpc>
+                <a:spcPct val="112000"/>
+              </a:lnSpc>
+            </a:pPr>
+            <a:r>
+              <a:rPr sz="2800" b="1">
+                <a:solidFill>
+                  <a:srgbClr val="1A1A1A"/>
+                </a:solidFill>
+                <a:latin typeface="Microsoft YaHei"/>
+                <a:ea typeface="Microsoft YaHei"/>
+                <a:cs typeface="Microsoft YaHei"/>
+              </a:rPr>
               <a:t>我们主动声明的边界 —— 不回避短板</a:t>
             </a:r>
           </a:p>
@@ -8322,7 +9197,7 @@
                 <a:ea typeface="Microsoft YaHei"/>
                 <a:cs typeface="Microsoft YaHei"/>
               </a:rPr>
-              <a:t>但对 12 张全新风格 ImageGen 直出图</a:t>
+              <a:t>对 12 张全新风格直出图只有 75%。</a:t>
             </a:r>
           </a:p>
           <a:p>
@@ -8340,7 +9215,7 @@
                 <a:ea typeface="Microsoft YaHei"/>
                 <a:cs typeface="Microsoft YaHei"/>
               </a:rPr>
-              <a:t>只有 66.7%。</a:t>
+              <a:t/>
             </a:r>
           </a:p>
           <a:p>
@@ -8358,7 +9233,7 @@
                 <a:ea typeface="Microsoft YaHei"/>
                 <a:cs typeface="Microsoft YaHei"/>
               </a:rPr>
-              <a:t/>
+              <a:t>对策：频域做生成器无关兜底 +</a:t>
             </a:r>
           </a:p>
           <a:p>
@@ -8376,7 +9251,7 @@
                 <a:ea typeface="Microsoft YaHei"/>
                 <a:cs typeface="Microsoft YaHei"/>
               </a:rPr>
-              <a:t>对策：频域做生成器无关兜底 +</a:t>
+              <a:t>第九件工具读可见 AI 标识（救回 3/3），</a:t>
             </a:r>
           </a:p>
           <a:p>
@@ -8394,7 +9269,7 @@
                 <a:ea typeface="Microsoft YaHei"/>
                 <a:cs typeface="Microsoft YaHei"/>
               </a:rPr>
-              <a:t>此类风格默认转人工复核。</a:t>
+              <a:t>仍漏的默认转人工复核。</a:t>
             </a:r>
           </a:p>
         </p:txBody>
@@ -8998,7 +9873,7 @@
 </p:sld>
 </file>
 
-<file path=ppt/slides/slide15.xml><?xml version="1.0" encoding="utf-8"?>
+<file path=ppt/slides/slide16.xml><?xml version="1.0" encoding="utf-8"?>
 <p:sld xmlns:a="http://schemas.openxmlformats.org/drawingml/2006/main" xmlns:p="http://schemas.openxmlformats.org/presentationml/2006/main" xmlns:r="http://schemas.openxmlformats.org/officeDocument/2006/relationships">
   <p:cSld>
     <p:spTree>
@@ -10358,7 +11233,7 @@
 </p:sld>
 </file>
 
-<file path=ppt/slides/slide16.xml><?xml version="1.0" encoding="utf-8"?>
+<file path=ppt/slides/slide17.xml><?xml version="1.0" encoding="utf-8"?>
 <p:sld xmlns:a="http://schemas.openxmlformats.org/drawingml/2006/main" xmlns:p="http://schemas.openxmlformats.org/presentationml/2006/main" xmlns:r="http://schemas.openxmlformats.org/officeDocument/2006/relationships">
   <p:cSld>
     <p:spTree>
@@ -11008,7 +11883,7 @@
                 <a:ea typeface="Microsoft YaHei"/>
                 <a:cs typeface="Microsoft YaHei"/>
               </a:rPr>
-              <a:t>108 项 pytest 全过（含 41 项本轮新增回归）</a:t>
+              <a:t>139 项 pytest 全过（本轮新增 25 项标识层回归）</a:t>
             </a:r>
           </a:p>
           <a:p>
@@ -11075,7 +11950,7 @@
 </p:sld>
 </file>
 
-<file path=ppt/slides/slide17.xml><?xml version="1.0" encoding="utf-8"?>
+<file path=ppt/slides/slide18.xml><?xml version="1.0" encoding="utf-8"?>
 <p:sld xmlns:a="http://schemas.openxmlformats.org/drawingml/2006/main" xmlns:p="http://schemas.openxmlformats.org/presentationml/2006/main" xmlns:r="http://schemas.openxmlformats.org/officeDocument/2006/relationships">
   <p:cSld>
     <p:spTree>
@@ -11786,7 +12661,7 @@
                           <a:ea typeface="Microsoft YaHei"/>
                           <a:cs typeface="Microsoft YaHei"/>
                         </a:rPr>
-                        <a:t>三形态具备；跨生成器 66.7%、真实标注集缺失</a:t>
+                        <a:t>三形态具备；跨生成器模型层 75%（标识层补 3/3）、真实标注集缺失</a:t>
                       </a:r>
                     </a:p>
                   </a:txBody>
@@ -12530,7 +13405,7 @@
 </p:sld>
 </file>
 
-<file path=ppt/slides/slide18.xml><?xml version="1.0" encoding="utf-8"?>
+<file path=ppt/slides/slide19.xml><?xml version="1.0" encoding="utf-8"?>
 <p:sld xmlns:a="http://schemas.openxmlformats.org/drawingml/2006/main" xmlns:p="http://schemas.openxmlformats.org/presentationml/2006/main" xmlns:r="http://schemas.openxmlformats.org/officeDocument/2006/relationships">
   <p:cSld>
     <p:spTree>
@@ -12910,7 +13785,590 @@
 </p:sld>
 </file>
 
-<file path=ppt/slides/slide19.xml><?xml version="1.0" encoding="utf-8"?>
+<file path=ppt/slides/slide2.xml><?xml version="1.0" encoding="utf-8"?>
+<p:sld xmlns:a="http://schemas.openxmlformats.org/drawingml/2006/main" xmlns:p="http://schemas.openxmlformats.org/presentationml/2006/main" xmlns:r="http://schemas.openxmlformats.org/officeDocument/2006/relationships">
+  <p:cSld>
+    <p:spTree>
+      <p:nvGrpSpPr>
+        <p:cNvPr id="1" name=""/>
+        <p:cNvGrpSpPr/>
+        <p:nvPr/>
+      </p:nvGrpSpPr>
+      <p:grpSpPr/>
+      <p:sp>
+        <p:nvSpPr>
+          <p:cNvPr id="2" name="Rounded Rectangle 1"/>
+          <p:cNvSpPr/>
+          <p:nvPr/>
+        </p:nvSpPr>
+        <p:spPr>
+          <a:xfrm>
+            <a:off x="0" y="0"/>
+            <a:ext cx="201168" cy="6858000"/>
+          </a:xfrm>
+          <a:prstGeom prst="roundRect">
+            <a:avLst/>
+          </a:prstGeom>
+          <a:solidFill>
+            <a:srgbClr val="C8A24B"/>
+          </a:solidFill>
+          <a:ln>
+            <a:noFill/>
+          </a:ln>
+          <a:effectLst/>
+        </p:spPr>
+        <p:style>
+          <a:lnRef idx="1">
+            <a:schemeClr val="accent1"/>
+          </a:lnRef>
+          <a:fillRef idx="3">
+            <a:schemeClr val="accent1"/>
+          </a:fillRef>
+          <a:effectRef idx="2">
+            <a:schemeClr val="accent1"/>
+          </a:effectRef>
+          <a:fontRef idx="minor">
+            <a:schemeClr val="lt1"/>
+          </a:fontRef>
+        </p:style>
+        <p:txBody>
+          <a:bodyPr rtlCol="0" anchor="ctr"/>
+          <a:lstStyle/>
+          <a:p>
+            <a:pPr algn="ctr"/>
+          </a:p>
+        </p:txBody>
+      </p:sp>
+      <p:sp>
+        <p:nvSpPr>
+          <p:cNvPr id="3" name="TextBox 2"/>
+          <p:cNvSpPr txBox="1"/>
+          <p:nvPr/>
+        </p:nvSpPr>
+        <p:spPr>
+          <a:xfrm>
+            <a:off x="502920" y="347472"/>
+            <a:ext cx="11155680" cy="731520"/>
+          </a:xfrm>
+          <a:prstGeom prst="rect">
+            <a:avLst/>
+          </a:prstGeom>
+          <a:noFill/>
+        </p:spPr>
+        <p:txBody>
+          <a:bodyPr wrap="square" anchor="t" lIns="45720" rIns="45720" tIns="18288" bIns="18288">
+            <a:spAutoFit/>
+          </a:bodyPr>
+          <a:lstStyle/>
+          <a:p>
+            <a:pPr algn="l">
+              <a:lnSpc>
+                <a:spcPct val="112000"/>
+              </a:lnSpc>
+            </a:pPr>
+            <a:r>
+              <a:rPr sz="2800" b="1">
+                <a:solidFill>
+                  <a:srgbClr val="1A1A1A"/>
+                </a:solidFill>
+                <a:latin typeface="Microsoft YaHei"/>
+                <a:ea typeface="Microsoft YaHei"/>
+                <a:cs typeface="Microsoft YaHei"/>
+              </a:rPr>
+              <a:t>三秒看懂 BeautyProof</a:t>
+            </a:r>
+          </a:p>
+        </p:txBody>
+      </p:sp>
+      <p:sp>
+        <p:nvSpPr>
+          <p:cNvPr id="4" name="TextBox 3"/>
+          <p:cNvSpPr txBox="1"/>
+          <p:nvPr/>
+        </p:nvSpPr>
+        <p:spPr>
+          <a:xfrm>
+            <a:off x="521207" y="1042415"/>
+            <a:ext cx="10972800" cy="384048"/>
+          </a:xfrm>
+          <a:prstGeom prst="rect">
+            <a:avLst/>
+          </a:prstGeom>
+          <a:noFill/>
+        </p:spPr>
+        <p:txBody>
+          <a:bodyPr wrap="square" anchor="t" lIns="45720" rIns="45720" tIns="18288" bIns="18288">
+            <a:spAutoFit/>
+          </a:bodyPr>
+          <a:lstStyle/>
+          <a:p>
+            <a:pPr algn="l">
+              <a:lnSpc>
+                <a:spcPct val="112000"/>
+              </a:lnSpc>
+            </a:pPr>
+            <a:r>
+              <a:rPr sz="1350" b="0">
+                <a:solidFill>
+                  <a:srgbClr val="6B7280"/>
+                </a:solidFill>
+                <a:latin typeface="Microsoft YaHei"/>
+                <a:ea typeface="Microsoft YaHei"/>
+                <a:cs typeface="Microsoft YaHei"/>
+              </a:rPr>
+              <a:t>一句话定位 + 交付形态</a:t>
+            </a:r>
+          </a:p>
+        </p:txBody>
+      </p:sp>
+      <p:sp>
+        <p:nvSpPr>
+          <p:cNvPr id="5" name="TextBox 4"/>
+          <p:cNvSpPr txBox="1"/>
+          <p:nvPr/>
+        </p:nvSpPr>
+        <p:spPr>
+          <a:xfrm>
+            <a:off x="548640" y="1783080"/>
+            <a:ext cx="11064240" cy="1005840"/>
+          </a:xfrm>
+          <a:prstGeom prst="rect">
+            <a:avLst/>
+          </a:prstGeom>
+          <a:noFill/>
+        </p:spPr>
+        <p:txBody>
+          <a:bodyPr wrap="square" anchor="t" lIns="45720" rIns="45720" tIns="18288" bIns="18288">
+            <a:spAutoFit/>
+          </a:bodyPr>
+          <a:lstStyle/>
+          <a:p>
+            <a:pPr algn="l">
+              <a:lnSpc>
+                <a:spcPct val="130000"/>
+              </a:lnSpc>
+            </a:pPr>
+            <a:r>
+              <a:rPr sz="1900" b="1">
+                <a:solidFill>
+                  <a:srgbClr val="1A1A1A"/>
+                </a:solidFill>
+                <a:latin typeface="Microsoft YaHei"/>
+                <a:ea typeface="Microsoft YaHei"/>
+                <a:cs typeface="Microsoft YaHei"/>
+              </a:rPr>
+              <a:t>面向美妆垂域的「多模态取证台」——一张图（或一段评论、一次跨平台比对）进去，</a:t>
+            </a:r>
+          </a:p>
+          <a:p>
+            <a:pPr algn="l">
+              <a:lnSpc>
+                <a:spcPct val="130000"/>
+              </a:lnSpc>
+            </a:pPr>
+            <a:r>
+              <a:rPr sz="1900" b="1">
+                <a:solidFill>
+                  <a:srgbClr val="1A1A1A"/>
+                </a:solidFill>
+                <a:latin typeface="Microsoft YaHei"/>
+                <a:ea typeface="Microsoft YaHei"/>
+                <a:cs typeface="Microsoft YaHei"/>
+              </a:rPr>
+              <a:t>一份普通人看得懂、法务能引用、平台可执行的信任结论出来。</a:t>
+            </a:r>
+          </a:p>
+        </p:txBody>
+      </p:sp>
+      <p:sp>
+        <p:nvSpPr>
+          <p:cNvPr id="6" name="TextBox 5"/>
+          <p:cNvSpPr txBox="1"/>
+          <p:nvPr/>
+        </p:nvSpPr>
+        <p:spPr>
+          <a:xfrm>
+            <a:off x="548640" y="3063240"/>
+            <a:ext cx="6949440" cy="3108960"/>
+          </a:xfrm>
+          <a:prstGeom prst="rect">
+            <a:avLst/>
+          </a:prstGeom>
+          <a:noFill/>
+        </p:spPr>
+        <p:txBody>
+          <a:bodyPr wrap="square">
+            <a:spAutoFit/>
+          </a:bodyPr>
+          <a:lstStyle/>
+          <a:p>
+            <a:pPr>
+              <a:lnSpc>
+                <a:spcPct val="108000"/>
+              </a:lnSpc>
+              <a:spcAft>
+                <a:spcPts val="700"/>
+              </a:spcAft>
+            </a:pPr>
+            <a:r>
+              <a:rPr sz="1600">
+                <a:solidFill>
+                  <a:srgbClr val="1A1A1A"/>
+                </a:solidFill>
+                <a:latin typeface="Microsoft YaHei"/>
+                <a:ea typeface="Microsoft YaHei"/>
+                <a:cs typeface="Microsoft YaHei"/>
+              </a:rPr>
+              <a:t>● 不是黑箱打分：9 件工具各出独立证据 → 规则引擎定四档 → 解释层翻译成人话。</a:t>
+            </a:r>
+          </a:p>
+          <a:p>
+            <a:pPr>
+              <a:lnSpc>
+                <a:spcPct val="108000"/>
+              </a:lnSpc>
+              <a:spcAft>
+                <a:spcPts val="700"/>
+              </a:spcAft>
+            </a:pPr>
+            <a:r>
+              <a:rPr sz="1600">
+                <a:solidFill>
+                  <a:srgbClr val="1A1A1A"/>
+                </a:solidFill>
+                <a:latin typeface="Microsoft YaHei"/>
+                <a:ea typeface="Microsoft YaHei"/>
+                <a:cs typeface="Microsoft YaHei"/>
+              </a:rPr>
+              <a:t>● 三条证据轴：生成轴（AIGC×频域）/ 篡改轴（ELA×TruFor）/ 内容溯源轴（OCR×文案×图文×跨平台）。</a:t>
+            </a:r>
+          </a:p>
+          <a:p>
+            <a:pPr>
+              <a:lnSpc>
+                <a:spcPct val="108000"/>
+              </a:lnSpc>
+              <a:spcAft>
+                <a:spcPts val="700"/>
+              </a:spcAft>
+            </a:pPr>
+            <a:r>
+              <a:rPr sz="1600">
+                <a:solidFill>
+                  <a:srgbClr val="1A1A1A"/>
+                </a:solidFill>
+                <a:latin typeface="Microsoft YaHei"/>
+                <a:ea typeface="Microsoft YaHei"/>
+                <a:cs typeface="Microsoft YaHei"/>
+              </a:rPr>
+              <a:t>● 纯 CPU 可跑、开源可复现、训练数据 100% 团队自产；已上线在线 Demo。</a:t>
+            </a:r>
+          </a:p>
+        </p:txBody>
+      </p:sp>
+      <p:sp>
+        <p:nvSpPr>
+          <p:cNvPr id="7" name="Rounded Rectangle 6"/>
+          <p:cNvSpPr/>
+          <p:nvPr/>
+        </p:nvSpPr>
+        <p:spPr>
+          <a:xfrm>
+            <a:off x="7680960" y="2148840"/>
+            <a:ext cx="3977639" cy="1417320"/>
+          </a:xfrm>
+          <a:prstGeom prst="roundRect">
+            <a:avLst/>
+          </a:prstGeom>
+          <a:solidFill>
+            <a:srgbClr val="F4F1EC"/>
+          </a:solidFill>
+          <a:ln>
+            <a:noFill/>
+          </a:ln>
+          <a:effectLst/>
+        </p:spPr>
+        <p:style>
+          <a:lnRef idx="1">
+            <a:schemeClr val="accent1"/>
+          </a:lnRef>
+          <a:fillRef idx="3">
+            <a:schemeClr val="accent1"/>
+          </a:fillRef>
+          <a:effectRef idx="2">
+            <a:schemeClr val="accent1"/>
+          </a:effectRef>
+          <a:fontRef idx="minor">
+            <a:schemeClr val="lt1"/>
+          </a:fontRef>
+        </p:style>
+        <p:txBody>
+          <a:bodyPr rtlCol="0" anchor="ctr"/>
+          <a:lstStyle/>
+          <a:p>
+            <a:pPr algn="ctr"/>
+          </a:p>
+        </p:txBody>
+      </p:sp>
+      <p:sp>
+        <p:nvSpPr>
+          <p:cNvPr id="8" name="Rounded Rectangle 7"/>
+          <p:cNvSpPr/>
+          <p:nvPr/>
+        </p:nvSpPr>
+        <p:spPr>
+          <a:xfrm>
+            <a:off x="7680960" y="2148840"/>
+            <a:ext cx="82296" cy="1417320"/>
+          </a:xfrm>
+          <a:prstGeom prst="roundRect">
+            <a:avLst/>
+          </a:prstGeom>
+          <a:solidFill>
+            <a:srgbClr val="C8A24B"/>
+          </a:solidFill>
+          <a:ln>
+            <a:noFill/>
+          </a:ln>
+          <a:effectLst/>
+        </p:spPr>
+        <p:style>
+          <a:lnRef idx="1">
+            <a:schemeClr val="accent1"/>
+          </a:lnRef>
+          <a:fillRef idx="3">
+            <a:schemeClr val="accent1"/>
+          </a:fillRef>
+          <a:effectRef idx="2">
+            <a:schemeClr val="accent1"/>
+          </a:effectRef>
+          <a:fontRef idx="minor">
+            <a:schemeClr val="lt1"/>
+          </a:fontRef>
+        </p:style>
+        <p:txBody>
+          <a:bodyPr rtlCol="0" anchor="ctr"/>
+          <a:lstStyle/>
+          <a:p>
+            <a:pPr algn="ctr"/>
+          </a:p>
+        </p:txBody>
+      </p:sp>
+      <p:sp>
+        <p:nvSpPr>
+          <p:cNvPr id="9" name="TextBox 8"/>
+          <p:cNvSpPr txBox="1"/>
+          <p:nvPr/>
+        </p:nvSpPr>
+        <p:spPr>
+          <a:xfrm>
+            <a:off x="7882128" y="2221992"/>
+            <a:ext cx="3666743" cy="1271016"/>
+          </a:xfrm>
+          <a:prstGeom prst="rect">
+            <a:avLst/>
+          </a:prstGeom>
+          <a:noFill/>
+        </p:spPr>
+        <p:txBody>
+          <a:bodyPr wrap="square" anchor="ctr" lIns="45720" rIns="45720" tIns="18288" bIns="18288">
+            <a:spAutoFit/>
+          </a:bodyPr>
+          <a:lstStyle/>
+          <a:p>
+            <a:pPr algn="l">
+              <a:lnSpc>
+                <a:spcPct val="112000"/>
+              </a:lnSpc>
+            </a:pPr>
+            <a:r>
+              <a:rPr sz="1500" b="0">
+                <a:solidFill>
+                  <a:srgbClr val="1A1A1A"/>
+                </a:solidFill>
+                <a:latin typeface="Microsoft YaHei"/>
+                <a:ea typeface="Microsoft YaHei"/>
+                <a:cs typeface="Microsoft YaHei"/>
+              </a:rPr>
+              <a:t>定位 = 美妆界的「内容体检中心」</a:t>
+            </a:r>
+          </a:p>
+          <a:p>
+            <a:pPr algn="l">
+              <a:lnSpc>
+                <a:spcPct val="112000"/>
+              </a:lnSpc>
+            </a:pPr>
+            <a:r>
+              <a:rPr sz="1500" b="0">
+                <a:solidFill>
+                  <a:srgbClr val="1A1A1A"/>
+                </a:solidFill>
+                <a:latin typeface="Microsoft YaHei"/>
+                <a:ea typeface="Microsoft YaHei"/>
+                <a:cs typeface="Microsoft YaHei"/>
+              </a:rPr>
+              <a:t>每张图都拿得到一份带证据的体检报告。</a:t>
+            </a:r>
+          </a:p>
+        </p:txBody>
+      </p:sp>
+      <p:sp>
+        <p:nvSpPr>
+          <p:cNvPr id="10" name="Rounded Rectangle 9"/>
+          <p:cNvSpPr/>
+          <p:nvPr/>
+        </p:nvSpPr>
+        <p:spPr>
+          <a:xfrm>
+            <a:off x="7680960" y="3749039"/>
+            <a:ext cx="3977639" cy="1600200"/>
+          </a:xfrm>
+          <a:prstGeom prst="roundRect">
+            <a:avLst/>
+          </a:prstGeom>
+          <a:solidFill>
+            <a:srgbClr val="1E1E24"/>
+          </a:solidFill>
+          <a:ln>
+            <a:noFill/>
+          </a:ln>
+          <a:effectLst/>
+        </p:spPr>
+        <p:style>
+          <a:lnRef idx="1">
+            <a:schemeClr val="accent1"/>
+          </a:lnRef>
+          <a:fillRef idx="3">
+            <a:schemeClr val="accent1"/>
+          </a:fillRef>
+          <a:effectRef idx="2">
+            <a:schemeClr val="accent1"/>
+          </a:effectRef>
+          <a:fontRef idx="minor">
+            <a:schemeClr val="lt1"/>
+          </a:fontRef>
+        </p:style>
+        <p:txBody>
+          <a:bodyPr rtlCol="0" anchor="ctr"/>
+          <a:lstStyle/>
+          <a:p>
+            <a:pPr algn="ctr"/>
+          </a:p>
+        </p:txBody>
+      </p:sp>
+      <p:sp>
+        <p:nvSpPr>
+          <p:cNvPr id="11" name="Rounded Rectangle 10"/>
+          <p:cNvSpPr/>
+          <p:nvPr/>
+        </p:nvSpPr>
+        <p:spPr>
+          <a:xfrm>
+            <a:off x="7680960" y="3749039"/>
+            <a:ext cx="82296" cy="1600200"/>
+          </a:xfrm>
+          <a:prstGeom prst="roundRect">
+            <a:avLst/>
+          </a:prstGeom>
+          <a:solidFill>
+            <a:srgbClr val="E89AA8"/>
+          </a:solidFill>
+          <a:ln>
+            <a:noFill/>
+          </a:ln>
+          <a:effectLst/>
+        </p:spPr>
+        <p:style>
+          <a:lnRef idx="1">
+            <a:schemeClr val="accent1"/>
+          </a:lnRef>
+          <a:fillRef idx="3">
+            <a:schemeClr val="accent1"/>
+          </a:fillRef>
+          <a:effectRef idx="2">
+            <a:schemeClr val="accent1"/>
+          </a:effectRef>
+          <a:fontRef idx="minor">
+            <a:schemeClr val="lt1"/>
+          </a:fontRef>
+        </p:style>
+        <p:txBody>
+          <a:bodyPr rtlCol="0" anchor="ctr"/>
+          <a:lstStyle/>
+          <a:p>
+            <a:pPr algn="ctr"/>
+          </a:p>
+        </p:txBody>
+      </p:sp>
+      <p:sp>
+        <p:nvSpPr>
+          <p:cNvPr id="12" name="TextBox 11"/>
+          <p:cNvSpPr txBox="1"/>
+          <p:nvPr/>
+        </p:nvSpPr>
+        <p:spPr>
+          <a:xfrm>
+            <a:off x="7882128" y="3822191"/>
+            <a:ext cx="3666743" cy="1453896"/>
+          </a:xfrm>
+          <a:prstGeom prst="rect">
+            <a:avLst/>
+          </a:prstGeom>
+          <a:noFill/>
+        </p:spPr>
+        <p:txBody>
+          <a:bodyPr wrap="square" anchor="ctr" lIns="45720" rIns="45720" tIns="18288" bIns="18288">
+            <a:spAutoFit/>
+          </a:bodyPr>
+          <a:lstStyle/>
+          <a:p>
+            <a:pPr algn="l">
+              <a:lnSpc>
+                <a:spcPct val="112000"/>
+              </a:lnSpc>
+            </a:pPr>
+            <a:r>
+              <a:rPr sz="1400" b="0">
+                <a:solidFill>
+                  <a:srgbClr val="FFFFFF"/>
+                </a:solidFill>
+                <a:latin typeface="Microsoft YaHei"/>
+                <a:ea typeface="Microsoft YaHei"/>
+                <a:cs typeface="Microsoft YaHei"/>
+              </a:rPr>
+              <a:t>三条交付形态：</a:t>
+            </a:r>
+          </a:p>
+          <a:p>
+            <a:pPr algn="l">
+              <a:lnSpc>
+                <a:spcPct val="112000"/>
+              </a:lnSpc>
+            </a:pPr>
+            <a:r>
+              <a:rPr sz="1400" b="0">
+                <a:solidFill>
+                  <a:srgbClr val="FFFFFF"/>
+                </a:solidFill>
+                <a:latin typeface="Microsoft YaHei"/>
+                <a:ea typeface="Microsoft YaHei"/>
+                <a:cs typeface="Microsoft YaHei"/>
+              </a:rPr>
+              <a:t>① Web 取证台 ② CLI/API 流水线 ③ PDF/MD 可审计报告</a:t>
+            </a:r>
+          </a:p>
+        </p:txBody>
+      </p:sp>
+    </p:spTree>
+  </p:cSld>
+  <p:clrMapOvr>
+    <a:masterClrMapping/>
+  </p:clrMapOvr>
+</p:sld>
+</file>
+
+<file path=ppt/slides/slide20.xml><?xml version="1.0" encoding="utf-8"?>
 <p:sld xmlns:a="http://schemas.openxmlformats.org/drawingml/2006/main" xmlns:p="http://schemas.openxmlformats.org/presentationml/2006/main" xmlns:r="http://schemas.openxmlformats.org/officeDocument/2006/relationships">
   <p:cSld>
     <p:spTree>
@@ -13796,590 +15254,7 @@
 </p:sld>
 </file>
 
-<file path=ppt/slides/slide2.xml><?xml version="1.0" encoding="utf-8"?>
-<p:sld xmlns:a="http://schemas.openxmlformats.org/drawingml/2006/main" xmlns:p="http://schemas.openxmlformats.org/presentationml/2006/main" xmlns:r="http://schemas.openxmlformats.org/officeDocument/2006/relationships">
-  <p:cSld>
-    <p:spTree>
-      <p:nvGrpSpPr>
-        <p:cNvPr id="1" name=""/>
-        <p:cNvGrpSpPr/>
-        <p:nvPr/>
-      </p:nvGrpSpPr>
-      <p:grpSpPr/>
-      <p:sp>
-        <p:nvSpPr>
-          <p:cNvPr id="2" name="Rounded Rectangle 1"/>
-          <p:cNvSpPr/>
-          <p:nvPr/>
-        </p:nvSpPr>
-        <p:spPr>
-          <a:xfrm>
-            <a:off x="0" y="0"/>
-            <a:ext cx="201168" cy="6858000"/>
-          </a:xfrm>
-          <a:prstGeom prst="roundRect">
-            <a:avLst/>
-          </a:prstGeom>
-          <a:solidFill>
-            <a:srgbClr val="C8A24B"/>
-          </a:solidFill>
-          <a:ln>
-            <a:noFill/>
-          </a:ln>
-          <a:effectLst/>
-        </p:spPr>
-        <p:style>
-          <a:lnRef idx="1">
-            <a:schemeClr val="accent1"/>
-          </a:lnRef>
-          <a:fillRef idx="3">
-            <a:schemeClr val="accent1"/>
-          </a:fillRef>
-          <a:effectRef idx="2">
-            <a:schemeClr val="accent1"/>
-          </a:effectRef>
-          <a:fontRef idx="minor">
-            <a:schemeClr val="lt1"/>
-          </a:fontRef>
-        </p:style>
-        <p:txBody>
-          <a:bodyPr rtlCol="0" anchor="ctr"/>
-          <a:lstStyle/>
-          <a:p>
-            <a:pPr algn="ctr"/>
-          </a:p>
-        </p:txBody>
-      </p:sp>
-      <p:sp>
-        <p:nvSpPr>
-          <p:cNvPr id="3" name="TextBox 2"/>
-          <p:cNvSpPr txBox="1"/>
-          <p:nvPr/>
-        </p:nvSpPr>
-        <p:spPr>
-          <a:xfrm>
-            <a:off x="502920" y="347472"/>
-            <a:ext cx="11155680" cy="731520"/>
-          </a:xfrm>
-          <a:prstGeom prst="rect">
-            <a:avLst/>
-          </a:prstGeom>
-          <a:noFill/>
-        </p:spPr>
-        <p:txBody>
-          <a:bodyPr wrap="square" anchor="t" lIns="45720" rIns="45720" tIns="18288" bIns="18288">
-            <a:spAutoFit/>
-          </a:bodyPr>
-          <a:lstStyle/>
-          <a:p>
-            <a:pPr algn="l">
-              <a:lnSpc>
-                <a:spcPct val="112000"/>
-              </a:lnSpc>
-            </a:pPr>
-            <a:r>
-              <a:rPr sz="2800" b="1">
-                <a:solidFill>
-                  <a:srgbClr val="1A1A1A"/>
-                </a:solidFill>
-                <a:latin typeface="Microsoft YaHei"/>
-                <a:ea typeface="Microsoft YaHei"/>
-                <a:cs typeface="Microsoft YaHei"/>
-              </a:rPr>
-              <a:t>三秒看懂 BeautyProof</a:t>
-            </a:r>
-          </a:p>
-        </p:txBody>
-      </p:sp>
-      <p:sp>
-        <p:nvSpPr>
-          <p:cNvPr id="4" name="TextBox 3"/>
-          <p:cNvSpPr txBox="1"/>
-          <p:nvPr/>
-        </p:nvSpPr>
-        <p:spPr>
-          <a:xfrm>
-            <a:off x="521207" y="1042415"/>
-            <a:ext cx="10972800" cy="384048"/>
-          </a:xfrm>
-          <a:prstGeom prst="rect">
-            <a:avLst/>
-          </a:prstGeom>
-          <a:noFill/>
-        </p:spPr>
-        <p:txBody>
-          <a:bodyPr wrap="square" anchor="t" lIns="45720" rIns="45720" tIns="18288" bIns="18288">
-            <a:spAutoFit/>
-          </a:bodyPr>
-          <a:lstStyle/>
-          <a:p>
-            <a:pPr algn="l">
-              <a:lnSpc>
-                <a:spcPct val="112000"/>
-              </a:lnSpc>
-            </a:pPr>
-            <a:r>
-              <a:rPr sz="1350" b="0">
-                <a:solidFill>
-                  <a:srgbClr val="6B7280"/>
-                </a:solidFill>
-                <a:latin typeface="Microsoft YaHei"/>
-                <a:ea typeface="Microsoft YaHei"/>
-                <a:cs typeface="Microsoft YaHei"/>
-              </a:rPr>
-              <a:t>一句话定位 + 交付形态</a:t>
-            </a:r>
-          </a:p>
-        </p:txBody>
-      </p:sp>
-      <p:sp>
-        <p:nvSpPr>
-          <p:cNvPr id="5" name="TextBox 4"/>
-          <p:cNvSpPr txBox="1"/>
-          <p:nvPr/>
-        </p:nvSpPr>
-        <p:spPr>
-          <a:xfrm>
-            <a:off x="548640" y="1783080"/>
-            <a:ext cx="11064240" cy="1005840"/>
-          </a:xfrm>
-          <a:prstGeom prst="rect">
-            <a:avLst/>
-          </a:prstGeom>
-          <a:noFill/>
-        </p:spPr>
-        <p:txBody>
-          <a:bodyPr wrap="square" anchor="t" lIns="45720" rIns="45720" tIns="18288" bIns="18288">
-            <a:spAutoFit/>
-          </a:bodyPr>
-          <a:lstStyle/>
-          <a:p>
-            <a:pPr algn="l">
-              <a:lnSpc>
-                <a:spcPct val="130000"/>
-              </a:lnSpc>
-            </a:pPr>
-            <a:r>
-              <a:rPr sz="1900" b="1">
-                <a:solidFill>
-                  <a:srgbClr val="1A1A1A"/>
-                </a:solidFill>
-                <a:latin typeface="Microsoft YaHei"/>
-                <a:ea typeface="Microsoft YaHei"/>
-                <a:cs typeface="Microsoft YaHei"/>
-              </a:rPr>
-              <a:t>面向美妆垂域的「多模态取证台」——一张图（或一段评论、一次跨平台比对）进去，</a:t>
-            </a:r>
-          </a:p>
-          <a:p>
-            <a:pPr algn="l">
-              <a:lnSpc>
-                <a:spcPct val="130000"/>
-              </a:lnSpc>
-            </a:pPr>
-            <a:r>
-              <a:rPr sz="1900" b="1">
-                <a:solidFill>
-                  <a:srgbClr val="1A1A1A"/>
-                </a:solidFill>
-                <a:latin typeface="Microsoft YaHei"/>
-                <a:ea typeface="Microsoft YaHei"/>
-                <a:cs typeface="Microsoft YaHei"/>
-              </a:rPr>
-              <a:t>一份普通人看得懂、法务能引用、平台可执行的信任结论出来。</a:t>
-            </a:r>
-          </a:p>
-        </p:txBody>
-      </p:sp>
-      <p:sp>
-        <p:nvSpPr>
-          <p:cNvPr id="6" name="TextBox 5"/>
-          <p:cNvSpPr txBox="1"/>
-          <p:nvPr/>
-        </p:nvSpPr>
-        <p:spPr>
-          <a:xfrm>
-            <a:off x="548640" y="3063240"/>
-            <a:ext cx="6949440" cy="3108960"/>
-          </a:xfrm>
-          <a:prstGeom prst="rect">
-            <a:avLst/>
-          </a:prstGeom>
-          <a:noFill/>
-        </p:spPr>
-        <p:txBody>
-          <a:bodyPr wrap="square">
-            <a:spAutoFit/>
-          </a:bodyPr>
-          <a:lstStyle/>
-          <a:p>
-            <a:pPr>
-              <a:lnSpc>
-                <a:spcPct val="108000"/>
-              </a:lnSpc>
-              <a:spcAft>
-                <a:spcPts val="700"/>
-              </a:spcAft>
-            </a:pPr>
-            <a:r>
-              <a:rPr sz="1600">
-                <a:solidFill>
-                  <a:srgbClr val="1A1A1A"/>
-                </a:solidFill>
-                <a:latin typeface="Microsoft YaHei"/>
-                <a:ea typeface="Microsoft YaHei"/>
-                <a:cs typeface="Microsoft YaHei"/>
-              </a:rPr>
-              <a:t>● 不是黑箱打分：8 件工具各出独立证据 → 规则引擎定四档 → 解释层翻译成人话。</a:t>
-            </a:r>
-          </a:p>
-          <a:p>
-            <a:pPr>
-              <a:lnSpc>
-                <a:spcPct val="108000"/>
-              </a:lnSpc>
-              <a:spcAft>
-                <a:spcPts val="700"/>
-              </a:spcAft>
-            </a:pPr>
-            <a:r>
-              <a:rPr sz="1600">
-                <a:solidFill>
-                  <a:srgbClr val="1A1A1A"/>
-                </a:solidFill>
-                <a:latin typeface="Microsoft YaHei"/>
-                <a:ea typeface="Microsoft YaHei"/>
-                <a:cs typeface="Microsoft YaHei"/>
-              </a:rPr>
-              <a:t>● 三条证据轴：生成轴（AIGC×频域）/ 篡改轴（ELA×TruFor）/ 内容溯源轴（OCR×文案×图文×跨平台）。</a:t>
-            </a:r>
-          </a:p>
-          <a:p>
-            <a:pPr>
-              <a:lnSpc>
-                <a:spcPct val="108000"/>
-              </a:lnSpc>
-              <a:spcAft>
-                <a:spcPts val="700"/>
-              </a:spcAft>
-            </a:pPr>
-            <a:r>
-              <a:rPr sz="1600">
-                <a:solidFill>
-                  <a:srgbClr val="1A1A1A"/>
-                </a:solidFill>
-                <a:latin typeface="Microsoft YaHei"/>
-                <a:ea typeface="Microsoft YaHei"/>
-                <a:cs typeface="Microsoft YaHei"/>
-              </a:rPr>
-              <a:t>● 纯 CPU 可跑、开源可复现、训练数据 100% 团队自产；已上线在线 Demo。</a:t>
-            </a:r>
-          </a:p>
-        </p:txBody>
-      </p:sp>
-      <p:sp>
-        <p:nvSpPr>
-          <p:cNvPr id="7" name="Rounded Rectangle 6"/>
-          <p:cNvSpPr/>
-          <p:nvPr/>
-        </p:nvSpPr>
-        <p:spPr>
-          <a:xfrm>
-            <a:off x="7680960" y="2148840"/>
-            <a:ext cx="3977639" cy="1417320"/>
-          </a:xfrm>
-          <a:prstGeom prst="roundRect">
-            <a:avLst/>
-          </a:prstGeom>
-          <a:solidFill>
-            <a:srgbClr val="F4F1EC"/>
-          </a:solidFill>
-          <a:ln>
-            <a:noFill/>
-          </a:ln>
-          <a:effectLst/>
-        </p:spPr>
-        <p:style>
-          <a:lnRef idx="1">
-            <a:schemeClr val="accent1"/>
-          </a:lnRef>
-          <a:fillRef idx="3">
-            <a:schemeClr val="accent1"/>
-          </a:fillRef>
-          <a:effectRef idx="2">
-            <a:schemeClr val="accent1"/>
-          </a:effectRef>
-          <a:fontRef idx="minor">
-            <a:schemeClr val="lt1"/>
-          </a:fontRef>
-        </p:style>
-        <p:txBody>
-          <a:bodyPr rtlCol="0" anchor="ctr"/>
-          <a:lstStyle/>
-          <a:p>
-            <a:pPr algn="ctr"/>
-          </a:p>
-        </p:txBody>
-      </p:sp>
-      <p:sp>
-        <p:nvSpPr>
-          <p:cNvPr id="8" name="Rounded Rectangle 7"/>
-          <p:cNvSpPr/>
-          <p:nvPr/>
-        </p:nvSpPr>
-        <p:spPr>
-          <a:xfrm>
-            <a:off x="7680960" y="2148840"/>
-            <a:ext cx="82296" cy="1417320"/>
-          </a:xfrm>
-          <a:prstGeom prst="roundRect">
-            <a:avLst/>
-          </a:prstGeom>
-          <a:solidFill>
-            <a:srgbClr val="C8A24B"/>
-          </a:solidFill>
-          <a:ln>
-            <a:noFill/>
-          </a:ln>
-          <a:effectLst/>
-        </p:spPr>
-        <p:style>
-          <a:lnRef idx="1">
-            <a:schemeClr val="accent1"/>
-          </a:lnRef>
-          <a:fillRef idx="3">
-            <a:schemeClr val="accent1"/>
-          </a:fillRef>
-          <a:effectRef idx="2">
-            <a:schemeClr val="accent1"/>
-          </a:effectRef>
-          <a:fontRef idx="minor">
-            <a:schemeClr val="lt1"/>
-          </a:fontRef>
-        </p:style>
-        <p:txBody>
-          <a:bodyPr rtlCol="0" anchor="ctr"/>
-          <a:lstStyle/>
-          <a:p>
-            <a:pPr algn="ctr"/>
-          </a:p>
-        </p:txBody>
-      </p:sp>
-      <p:sp>
-        <p:nvSpPr>
-          <p:cNvPr id="9" name="TextBox 8"/>
-          <p:cNvSpPr txBox="1"/>
-          <p:nvPr/>
-        </p:nvSpPr>
-        <p:spPr>
-          <a:xfrm>
-            <a:off x="7882128" y="2221992"/>
-            <a:ext cx="3666743" cy="1271016"/>
-          </a:xfrm>
-          <a:prstGeom prst="rect">
-            <a:avLst/>
-          </a:prstGeom>
-          <a:noFill/>
-        </p:spPr>
-        <p:txBody>
-          <a:bodyPr wrap="square" anchor="ctr" lIns="45720" rIns="45720" tIns="18288" bIns="18288">
-            <a:spAutoFit/>
-          </a:bodyPr>
-          <a:lstStyle/>
-          <a:p>
-            <a:pPr algn="l">
-              <a:lnSpc>
-                <a:spcPct val="112000"/>
-              </a:lnSpc>
-            </a:pPr>
-            <a:r>
-              <a:rPr sz="1500" b="0">
-                <a:solidFill>
-                  <a:srgbClr val="1A1A1A"/>
-                </a:solidFill>
-                <a:latin typeface="Microsoft YaHei"/>
-                <a:ea typeface="Microsoft YaHei"/>
-                <a:cs typeface="Microsoft YaHei"/>
-              </a:rPr>
-              <a:t>定位 = 美妆界的「内容体检中心」</a:t>
-            </a:r>
-          </a:p>
-          <a:p>
-            <a:pPr algn="l">
-              <a:lnSpc>
-                <a:spcPct val="112000"/>
-              </a:lnSpc>
-            </a:pPr>
-            <a:r>
-              <a:rPr sz="1500" b="0">
-                <a:solidFill>
-                  <a:srgbClr val="1A1A1A"/>
-                </a:solidFill>
-                <a:latin typeface="Microsoft YaHei"/>
-                <a:ea typeface="Microsoft YaHei"/>
-                <a:cs typeface="Microsoft YaHei"/>
-              </a:rPr>
-              <a:t>每张图都拿得到一份带证据的体检报告。</a:t>
-            </a:r>
-          </a:p>
-        </p:txBody>
-      </p:sp>
-      <p:sp>
-        <p:nvSpPr>
-          <p:cNvPr id="10" name="Rounded Rectangle 9"/>
-          <p:cNvSpPr/>
-          <p:nvPr/>
-        </p:nvSpPr>
-        <p:spPr>
-          <a:xfrm>
-            <a:off x="7680960" y="3749039"/>
-            <a:ext cx="3977639" cy="1600200"/>
-          </a:xfrm>
-          <a:prstGeom prst="roundRect">
-            <a:avLst/>
-          </a:prstGeom>
-          <a:solidFill>
-            <a:srgbClr val="1E1E24"/>
-          </a:solidFill>
-          <a:ln>
-            <a:noFill/>
-          </a:ln>
-          <a:effectLst/>
-        </p:spPr>
-        <p:style>
-          <a:lnRef idx="1">
-            <a:schemeClr val="accent1"/>
-          </a:lnRef>
-          <a:fillRef idx="3">
-            <a:schemeClr val="accent1"/>
-          </a:fillRef>
-          <a:effectRef idx="2">
-            <a:schemeClr val="accent1"/>
-          </a:effectRef>
-          <a:fontRef idx="minor">
-            <a:schemeClr val="lt1"/>
-          </a:fontRef>
-        </p:style>
-        <p:txBody>
-          <a:bodyPr rtlCol="0" anchor="ctr"/>
-          <a:lstStyle/>
-          <a:p>
-            <a:pPr algn="ctr"/>
-          </a:p>
-        </p:txBody>
-      </p:sp>
-      <p:sp>
-        <p:nvSpPr>
-          <p:cNvPr id="11" name="Rounded Rectangle 10"/>
-          <p:cNvSpPr/>
-          <p:nvPr/>
-        </p:nvSpPr>
-        <p:spPr>
-          <a:xfrm>
-            <a:off x="7680960" y="3749039"/>
-            <a:ext cx="82296" cy="1600200"/>
-          </a:xfrm>
-          <a:prstGeom prst="roundRect">
-            <a:avLst/>
-          </a:prstGeom>
-          <a:solidFill>
-            <a:srgbClr val="E89AA8"/>
-          </a:solidFill>
-          <a:ln>
-            <a:noFill/>
-          </a:ln>
-          <a:effectLst/>
-        </p:spPr>
-        <p:style>
-          <a:lnRef idx="1">
-            <a:schemeClr val="accent1"/>
-          </a:lnRef>
-          <a:fillRef idx="3">
-            <a:schemeClr val="accent1"/>
-          </a:fillRef>
-          <a:effectRef idx="2">
-            <a:schemeClr val="accent1"/>
-          </a:effectRef>
-          <a:fontRef idx="minor">
-            <a:schemeClr val="lt1"/>
-          </a:fontRef>
-        </p:style>
-        <p:txBody>
-          <a:bodyPr rtlCol="0" anchor="ctr"/>
-          <a:lstStyle/>
-          <a:p>
-            <a:pPr algn="ctr"/>
-          </a:p>
-        </p:txBody>
-      </p:sp>
-      <p:sp>
-        <p:nvSpPr>
-          <p:cNvPr id="12" name="TextBox 11"/>
-          <p:cNvSpPr txBox="1"/>
-          <p:nvPr/>
-        </p:nvSpPr>
-        <p:spPr>
-          <a:xfrm>
-            <a:off x="7882128" y="3822191"/>
-            <a:ext cx="3666743" cy="1453896"/>
-          </a:xfrm>
-          <a:prstGeom prst="rect">
-            <a:avLst/>
-          </a:prstGeom>
-          <a:noFill/>
-        </p:spPr>
-        <p:txBody>
-          <a:bodyPr wrap="square" anchor="ctr" lIns="45720" rIns="45720" tIns="18288" bIns="18288">
-            <a:spAutoFit/>
-          </a:bodyPr>
-          <a:lstStyle/>
-          <a:p>
-            <a:pPr algn="l">
-              <a:lnSpc>
-                <a:spcPct val="112000"/>
-              </a:lnSpc>
-            </a:pPr>
-            <a:r>
-              <a:rPr sz="1400" b="0">
-                <a:solidFill>
-                  <a:srgbClr val="FFFFFF"/>
-                </a:solidFill>
-                <a:latin typeface="Microsoft YaHei"/>
-                <a:ea typeface="Microsoft YaHei"/>
-                <a:cs typeface="Microsoft YaHei"/>
-              </a:rPr>
-              <a:t>三条交付形态：</a:t>
-            </a:r>
-          </a:p>
-          <a:p>
-            <a:pPr algn="l">
-              <a:lnSpc>
-                <a:spcPct val="112000"/>
-              </a:lnSpc>
-            </a:pPr>
-            <a:r>
-              <a:rPr sz="1400" b="0">
-                <a:solidFill>
-                  <a:srgbClr val="FFFFFF"/>
-                </a:solidFill>
-                <a:latin typeface="Microsoft YaHei"/>
-                <a:ea typeface="Microsoft YaHei"/>
-                <a:cs typeface="Microsoft YaHei"/>
-              </a:rPr>
-              <a:t>① Web 取证台 ② CLI/API 流水线 ③ PDF/MD 可审计报告</a:t>
-            </a:r>
-          </a:p>
-        </p:txBody>
-      </p:sp>
-    </p:spTree>
-  </p:cSld>
-  <p:clrMapOvr>
-    <a:masterClrMapping/>
-  </p:clrMapOvr>
-</p:sld>
-</file>
-
-<file path=ppt/slides/slide20.xml><?xml version="1.0" encoding="utf-8"?>
+<file path=ppt/slides/slide21.xml><?xml version="1.0" encoding="utf-8"?>
 <p:sld xmlns:a="http://schemas.openxmlformats.org/drawingml/2006/main" xmlns:p="http://schemas.openxmlformats.org/presentationml/2006/main" xmlns:r="http://schemas.openxmlformats.org/officeDocument/2006/relationships">
   <p:cSld>
     <p:bg>
@@ -14559,7 +15434,7 @@
                 <a:ea typeface="Microsoft YaHei"/>
                 <a:cs typeface="Microsoft YaHei"/>
               </a:rPr>
-              <a:t>三条独立证据轴 · 双检测器级联 94.7% / 自动下架误伤 0 · 108 项测试 · 全开源可复现</a:t>
+              <a:t>三条独立证据轴 · 双检测器级联 94.7% / 自动下架误伤 0 · 139 项测试 · 全开源可复现</a:t>
             </a:r>
           </a:p>
         </p:txBody>
@@ -15599,7 +16474,7 @@
                           <a:ea typeface="Microsoft YaHei"/>
                           <a:cs typeface="Microsoft YaHei"/>
                         </a:rPr>
-                        <a:t>8 件工具：看图 5 件（hash/c2pa/ela/spectral/trufor/aigc）+ 读字 2 件（ocr/text）+ 跨模态 1 件</a:t>
+                        <a:t>9 件工具：像素与频域 4 件（hash/c2pa/ela/spectral）+ 生成检测 1 件（aigc 本域微调）+ 篡改定位 1 件（trufor）+ 读字 2 件（ocr / ai_label 可见AI标识）+ 文案与图文交叉 1 件（text/crossmodal）</a:t>
                       </a:r>
                     </a:p>
                   </a:txBody>
@@ -16415,7 +17290,7 @@
                 <a:ea typeface="Microsoft YaHei"/>
                 <a:cs typeface="Microsoft YaHei"/>
               </a:rPr>
-              <a:t>8 件取证工具</a:t>
+              <a:t>9 件取证工具</a:t>
             </a:r>
           </a:p>
         </p:txBody>
@@ -17348,7 +18223,7 @@
                 <a:ea typeface="Microsoft YaHei"/>
                 <a:cs typeface="Microsoft YaHei"/>
               </a:rPr>
-              <a:t>八件工具，分三条轴——不是堆料</a:t>
+              <a:t>九件工具，分三条轴——不是堆料</a:t>
             </a:r>
           </a:p>
         </p:txBody>
@@ -19291,7 +20166,7 @@
                 <a:ea typeface="Microsoft YaHei"/>
                 <a:cs typeface="Microsoft YaHei"/>
               </a:rPr>
-              <a:t>左右两轴对彼此的失效场景完全沉默——这是取舍的结果，不是巧合。当作「我用了 8 个工具」讲，评委只会记成工具堆料；当作「三条轴互相补位」讲，才是架构贡献。</a:t>
+              <a:t>左右两轴对彼此的失效场景完全沉默——这是取舍的结果，不是巧合。当作「我用了 9 个工具」讲，评委只会记成工具堆料；当作「三条轴互相补位」讲，才是架构贡献。</a:t>
             </a:r>
           </a:p>
         </p:txBody>
@@ -21762,7 +22637,7 @@
                 <a:ea typeface="Microsoft YaHei"/>
                 <a:cs typeface="Microsoft YaHei"/>
               </a:rPr>
-              <a:t>8 工具图文流水线 + 合规法条引擎。</a:t>
+              <a:t>9 工具图文流水线 + 合规法条引擎。</a:t>
             </a:r>
           </a:p>
           <a:p>

--- a/docs/BeautyProof_答辩PPT.pptx
+++ b/docs/BeautyProof_答辩PPT.pptx
@@ -8358,7 +8358,7 @@
                           <a:ea typeface="Microsoft YaHei"/>
                           <a:cs typeface="Microsoft YaHei"/>
                         </a:rPr>
-                        <a:t>3 张漏检图右下角都带平台自动打的「AI生成」标识，OCR 抄写置信度 0.95 ~ 0.995</a:t>
+                        <a:t>两批全新风格 held-out 共 24 张，模型漏 7 张；这 7 张图上全带平台自动打的「AI生成」标识（OCR 置信度 0.95 ~ 0.995）</a:t>
                       </a:r>
                     </a:p>
                   </a:txBody>
@@ -8383,7 +8383,7 @@
                           <a:ea typeface="Microsoft YaHei"/>
                           <a:cs typeface="Microsoft YaHei"/>
                         </a:rPr>
-                        <a:t>3 / 3 命中</a:t>
+                        <a:t>救回 7 / 7</a:t>
                       </a:r>
                     </a:p>
                   </a:txBody>
@@ -8460,7 +8460,7 @@
                           <a:ea typeface="Microsoft YaHei"/>
                           <a:cs typeface="Microsoft YaHei"/>
                         </a:rPr>
-                        <a:t>12 / 12 = 100%</a:t>
+                        <a:t>AI 50/50 · 真实图误报 0/30</a:t>
                       </a:r>
                     </a:p>
                   </a:txBody>
@@ -8844,7 +8844,7 @@
                 <a:ea typeface="Microsoft YaHei"/>
                 <a:cs typeface="Microsoft YaHei"/>
               </a:rPr>
-              <a:t>● 诚实边界：标识可被伪造/贴图；洗掉标识再发布的 AI 图本工具发现不了 —— 标识层是补偿，不是替代，那类图仍靠 AIGC + 频域 + TruFor。</a:t>
+              <a:t>● 诚实边界：标识可被伪造/贴图；洗掉标识再发布的 AI 图本工具发现不了 —— 标识层是补偿，不是替代，那类图仍靠 AIGC + 频域 + TruFor；这批评测图带平台水印，本身有偏，不能当生产准确率。</a:t>
             </a:r>
           </a:p>
           <a:p>

--- a/docs/BeautyProof_答辩PPT.pptx
+++ b/docs/BeautyProof_答辩PPT.pptx
@@ -3116,9 +3116,79 @@
         <p:nvPr/>
       </p:nvGrpSpPr>
       <p:grpSpPr/>
-      <p:sp>
-        <p:nvSpPr>
-          <p:cNvPr id="2" name="Rounded Rectangle 1"/>
+      <p:pic>
+        <p:nvPicPr>
+          <p:cNvPr id="2" name="Picture 1" descr="cover_main.jpg"/>
+          <p:cNvPicPr>
+            <a:picLocks noChangeAspect="1"/>
+          </p:cNvPicPr>
+          <p:nvPr/>
+        </p:nvPicPr>
+        <p:blipFill>
+          <a:blip r:embed="rId2"/>
+          <a:stretch>
+            <a:fillRect/>
+          </a:stretch>
+        </p:blipFill>
+        <p:spPr>
+          <a:xfrm>
+            <a:off x="0" y="0"/>
+            <a:ext cx="12191695" cy="6858000"/>
+          </a:xfrm>
+          <a:prstGeom prst="rect">
+            <a:avLst/>
+          </a:prstGeom>
+        </p:spPr>
+      </p:pic>
+      <p:sp>
+        <p:nvSpPr>
+          <p:cNvPr id="3" name="Rectangle 2"/>
+          <p:cNvSpPr/>
+          <p:nvPr/>
+        </p:nvSpPr>
+        <p:spPr>
+          <a:xfrm>
+            <a:off x="0" y="0"/>
+            <a:ext cx="12191695" cy="6858000"/>
+          </a:xfrm>
+          <a:prstGeom prst="rect">
+            <a:avLst/>
+          </a:prstGeom>
+          <a:solidFill>
+            <a:srgbClr val="121216">
+              <a:alpha val="6400"/>
+            </a:srgbClr>
+          </a:solidFill>
+          <a:ln>
+            <a:noFill/>
+          </a:ln>
+          <a:effectLst/>
+        </p:spPr>
+        <p:style>
+          <a:lnRef idx="1">
+            <a:schemeClr val="accent1"/>
+          </a:lnRef>
+          <a:fillRef idx="3">
+            <a:schemeClr val="accent1"/>
+          </a:fillRef>
+          <a:effectRef idx="2">
+            <a:schemeClr val="accent1"/>
+          </a:effectRef>
+          <a:fontRef idx="minor">
+            <a:schemeClr val="lt1"/>
+          </a:fontRef>
+        </p:style>
+        <p:txBody>
+          <a:bodyPr rtlCol="0" anchor="ctr"/>
+          <a:lstStyle/>
+          <a:p>
+            <a:pPr algn="ctr"/>
+          </a:p>
+        </p:txBody>
+      </p:sp>
+      <p:sp>
+        <p:nvSpPr>
+          <p:cNvPr id="4" name="Rounded Rectangle 3"/>
           <p:cNvSpPr/>
           <p:nvPr/>
         </p:nvSpPr>
@@ -3162,7 +3232,7 @@
       </p:sp>
       <p:sp>
         <p:nvSpPr>
-          <p:cNvPr id="3" name="TextBox 2"/>
+          <p:cNvPr id="5" name="TextBox 4"/>
           <p:cNvSpPr txBox="1"/>
           <p:nvPr/>
         </p:nvSpPr>
@@ -3203,7 +3273,7 @@
       </p:sp>
       <p:sp>
         <p:nvSpPr>
-          <p:cNvPr id="4" name="TextBox 3"/>
+          <p:cNvPr id="6" name="TextBox 5"/>
           <p:cNvSpPr txBox="1"/>
           <p:nvPr/>
         </p:nvSpPr>
@@ -3244,7 +3314,7 @@
       </p:sp>
       <p:sp>
         <p:nvSpPr>
-          <p:cNvPr id="5" name="TextBox 4"/>
+          <p:cNvPr id="7" name="TextBox 6"/>
           <p:cNvSpPr txBox="1"/>
           <p:nvPr/>
         </p:nvSpPr>
@@ -3285,7 +3355,7 @@
       </p:sp>
       <p:sp>
         <p:nvSpPr>
-          <p:cNvPr id="6" name="TextBox 5"/>
+          <p:cNvPr id="8" name="TextBox 7"/>
           <p:cNvSpPr txBox="1"/>
           <p:nvPr/>
         </p:nvSpPr>
@@ -3326,7 +3396,7 @@
       </p:sp>
       <p:sp>
         <p:nvSpPr>
-          <p:cNvPr id="7" name="TextBox 6"/>
+          <p:cNvPr id="9" name="TextBox 8"/>
           <p:cNvSpPr txBox="1"/>
           <p:nvPr/>
         </p:nvSpPr>
@@ -15272,9 +15342,79 @@
         <p:nvPr/>
       </p:nvGrpSpPr>
       <p:grpSpPr/>
-      <p:sp>
-        <p:nvSpPr>
-          <p:cNvPr id="2" name="Rounded Rectangle 1"/>
+      <p:pic>
+        <p:nvPicPr>
+          <p:cNvPr id="2" name="Picture 1" descr="closing_main.jpg"/>
+          <p:cNvPicPr>
+            <a:picLocks noChangeAspect="1"/>
+          </p:cNvPicPr>
+          <p:nvPr/>
+        </p:nvPicPr>
+        <p:blipFill>
+          <a:blip r:embed="rId2"/>
+          <a:stretch>
+            <a:fillRect/>
+          </a:stretch>
+        </p:blipFill>
+        <p:spPr>
+          <a:xfrm>
+            <a:off x="0" y="0"/>
+            <a:ext cx="12191695" cy="6858000"/>
+          </a:xfrm>
+          <a:prstGeom prst="rect">
+            <a:avLst/>
+          </a:prstGeom>
+        </p:spPr>
+      </p:pic>
+      <p:sp>
+        <p:nvSpPr>
+          <p:cNvPr id="3" name="Rectangle 2"/>
+          <p:cNvSpPr/>
+          <p:nvPr/>
+        </p:nvSpPr>
+        <p:spPr>
+          <a:xfrm>
+            <a:off x="0" y="0"/>
+            <a:ext cx="12191695" cy="6858000"/>
+          </a:xfrm>
+          <a:prstGeom prst="rect">
+            <a:avLst/>
+          </a:prstGeom>
+          <a:solidFill>
+            <a:srgbClr val="121216">
+              <a:alpha val="6600"/>
+            </a:srgbClr>
+          </a:solidFill>
+          <a:ln>
+            <a:noFill/>
+          </a:ln>
+          <a:effectLst/>
+        </p:spPr>
+        <p:style>
+          <a:lnRef idx="1">
+            <a:schemeClr val="accent1"/>
+          </a:lnRef>
+          <a:fillRef idx="3">
+            <a:schemeClr val="accent1"/>
+          </a:fillRef>
+          <a:effectRef idx="2">
+            <a:schemeClr val="accent1"/>
+          </a:effectRef>
+          <a:fontRef idx="minor">
+            <a:schemeClr val="lt1"/>
+          </a:fontRef>
+        </p:style>
+        <p:txBody>
+          <a:bodyPr rtlCol="0" anchor="ctr"/>
+          <a:lstStyle/>
+          <a:p>
+            <a:pPr algn="ctr"/>
+          </a:p>
+        </p:txBody>
+      </p:sp>
+      <p:sp>
+        <p:nvSpPr>
+          <p:cNvPr id="4" name="Rounded Rectangle 3"/>
           <p:cNvSpPr/>
           <p:nvPr/>
         </p:nvSpPr>
@@ -15318,7 +15458,7 @@
       </p:sp>
       <p:sp>
         <p:nvSpPr>
-          <p:cNvPr id="3" name="TextBox 2"/>
+          <p:cNvPr id="5" name="TextBox 4"/>
           <p:cNvSpPr txBox="1"/>
           <p:nvPr/>
         </p:nvSpPr>
@@ -15359,7 +15499,7 @@
       </p:sp>
       <p:sp>
         <p:nvSpPr>
-          <p:cNvPr id="4" name="TextBox 3"/>
+          <p:cNvPr id="6" name="TextBox 5"/>
           <p:cNvSpPr txBox="1"/>
           <p:nvPr/>
         </p:nvSpPr>
@@ -15400,7 +15540,7 @@
       </p:sp>
       <p:sp>
         <p:nvSpPr>
-          <p:cNvPr id="5" name="TextBox 4"/>
+          <p:cNvPr id="7" name="TextBox 6"/>
           <p:cNvSpPr txBox="1"/>
           <p:nvPr/>
         </p:nvSpPr>
@@ -15441,7 +15581,7 @@
       </p:sp>
       <p:sp>
         <p:nvSpPr>
-          <p:cNvPr id="6" name="TextBox 5"/>
+          <p:cNvPr id="8" name="TextBox 7"/>
           <p:cNvSpPr txBox="1"/>
           <p:nvPr/>
         </p:nvSpPr>

--- a/docs/BeautyProof_答辩PPT.pptx
+++ b/docs/BeautyProof_答辩PPT.pptx
@@ -13139,7 +13139,7 @@
                           <a:ea typeface="Microsoft YaHei"/>
                           <a:cs typeface="Microsoft YaHei"/>
                         </a:rPr>
-                        <a:t>零基础 owner 主导完整系统；角色互补</a:t>
+                        <a:t>产品侧定业务与叙事、工程侧交付可复现系统，角色互补</a:t>
                       </a:r>
                     </a:p>
                   </a:txBody>
@@ -13241,7 +13241,7 @@
                           <a:ea typeface="Microsoft YaHei"/>
                           <a:cs typeface="Microsoft YaHei"/>
                         </a:rPr>
-                        <a:t>从 CV/ML/Agent 零基础到完整取证系统，快速试错</a:t>
+                        <a:t>CV / 频域 / Agent 三方向均无既往积累，独立完成数据设计→模型迭代→评测→交付闭环</a:t>
                       </a:r>
                     </a:p>
                   </a:txBody>
@@ -13565,7 +13565,7 @@
                 <a:ea typeface="Microsoft YaHei"/>
                 <a:cs typeface="Microsoft YaHei"/>
               </a:rPr>
-              <a:t>团队：从零基础到完整系统</a:t>
+              <a:t>团队：从零构建到可交付系统</a:t>
             </a:r>
           </a:p>
         </p:txBody>
@@ -13650,7 +13650,7 @@
                 <a:ea typeface="Microsoft YaHei"/>
                 <a:cs typeface="Microsoft YaHei"/>
               </a:rPr>
-              <a:t>● LEARNING AGILITY：owner 为准大一、自述零技术背景，从 CV / ML / Agent 零基础主导整套取证系统，含模型训练、评测协议、答辩叙事全流程。</a:t>
+              <a:t>● LEARNING AGILITY：在 CV / 频域 / Agent 三个方向均无既往积累的前提下，独立完成「数据设计 → 模型迭代（本域微调 v1–v4）→ 评测协议 → 交付与答辩」的完整闭环。</a:t>
             </a:r>
           </a:p>
           <a:p>
@@ -13713,7 +13713,7 @@
                 <a:ea typeface="Microsoft YaHei"/>
                 <a:cs typeface="Microsoft YaHei"/>
               </a:rPr>
-              <a:t>● EMPATHY（当前最弱）：owner 定业务与叙事方向，AI 工程执行，队友 liying856 协助；缺的是「团队协作过程留痕」与真人用户验证 —— 本轮已补的部分是逐字稿、任务卡与分工文档（docs/ 下）。</a:t>
+              <a:t>● EMPATHY（当前最弱）：产品侧负责业务定义与叙事，工程侧负责系统落地，队友 liying856 协作；缺的是「团队协作过程留痕」与真人用户验证 —— 本轮已补的部分是逐字稿、任务卡与分工文档（docs/ 下）。</a:t>
             </a:r>
           </a:p>
         </p:txBody>
@@ -13842,7 +13842,7 @@
                 <a:ea typeface="Microsoft YaHei"/>
                 <a:cs typeface="Microsoft YaHei"/>
               </a:rPr>
-              <a:t>我们不讳言起点低 —— 但 8 周把「看不懂」变成了「能拿去答辩」，并且把每一次翻车都写进了可复现的记录里。</a:t>
+              <a:t>我们不讳言这是一次从零构建 —— 但每一轮失败都留下了可复现的评测记录：v5 / v7 未满足晋升口径即不晋升，负面结果照实归档。</a:t>
             </a:r>
           </a:p>
         </p:txBody>

--- a/docs/BeautyProof_答辩PPT.pptx
+++ b/docs/BeautyProof_答辩PPT.pptx
@@ -5908,7 +5908,7 @@
         </p:nvGraphicFramePr>
         <p:xfrm>
           <a:off x="457200" y="1828800"/>
-          <a:ext cx="11247118" cy="3200400"/>
+          <a:ext cx="11247119" cy="3749039"/>
         </p:xfrm>
         <a:graphic>
           <a:graphicData uri="http://schemas.openxmlformats.org/drawingml/2006/table">
@@ -5918,11 +5918,11 @@
               </a:tblPr>
               <a:tblGrid>
                 <a:gridCol w="2474366"/>
-                <a:gridCol w="3149193"/>
-                <a:gridCol w="2474366"/>
+                <a:gridCol w="3374136"/>
+                <a:gridCol w="2249424"/>
                 <a:gridCol w="3149193"/>
               </a:tblGrid>
-              <a:tr h="533400">
+              <a:tr h="535577">
                 <a:tc>
                   <a:txBody>
                     <a:bodyPr wrap="square"/>
@@ -5930,7 +5930,7 @@
                     <a:p>
                       <a:pPr algn="l"/>
                       <a:r>
-                        <a:rPr sz="1250" b="1">
+                        <a:rPr sz="1200" b="1">
                           <a:solidFill>
                             <a:srgbClr val="FFFFFF"/>
                           </a:solidFill>
@@ -5955,7 +5955,7 @@
                     <a:p>
                       <a:pPr algn="ctr"/>
                       <a:r>
-                        <a:rPr sz="1250" b="1">
+                        <a:rPr sz="1200" b="1">
                           <a:solidFill>
                             <a:srgbClr val="FFFFFF"/>
                           </a:solidFill>
@@ -5980,7 +5980,7 @@
                     <a:p>
                       <a:pPr algn="ctr"/>
                       <a:r>
-                        <a:rPr sz="1250" b="1">
+                        <a:rPr sz="1200" b="1">
                           <a:solidFill>
                             <a:srgbClr val="FFFFFF"/>
                           </a:solidFill>
@@ -6005,7 +6005,7 @@
                     <a:p>
                       <a:pPr algn="ctr"/>
                       <a:r>
-                        <a:rPr sz="1250" b="1">
+                        <a:rPr sz="1200" b="1">
                           <a:solidFill>
                             <a:srgbClr val="FFFFFF"/>
                           </a:solidFill>
@@ -6024,7 +6024,7 @@
                   </a:tcPr>
                 </a:tc>
               </a:tr>
-              <a:tr h="533400">
+              <a:tr h="535577">
                 <a:tc>
                   <a:txBody>
                     <a:bodyPr wrap="square"/>
@@ -6032,7 +6032,7 @@
                     <a:p>
                       <a:pPr algn="l"/>
                       <a:r>
-                        <a:rPr sz="1250" b="0">
+                        <a:rPr sz="1200" b="0">
                           <a:solidFill>
                             <a:srgbClr val="1A1A1A"/>
                           </a:solidFill>
@@ -6057,7 +6057,7 @@
                     <a:p>
                       <a:pPr algn="ctr"/>
                       <a:r>
-                        <a:rPr sz="1250" b="0">
+                        <a:rPr sz="1200" b="0">
                           <a:solidFill>
                             <a:srgbClr val="1A1A1A"/>
                           </a:solidFill>
@@ -6082,7 +6082,7 @@
                     <a:p>
                       <a:pPr algn="ctr"/>
                       <a:r>
-                        <a:rPr sz="1250" b="0">
+                        <a:rPr sz="1200" b="0">
                           <a:solidFill>
                             <a:srgbClr val="1A1A1A"/>
                           </a:solidFill>
@@ -6107,7 +6107,7 @@
                     <a:p>
                       <a:pPr algn="ctr"/>
                       <a:r>
-                        <a:rPr sz="1250" b="0">
+                        <a:rPr sz="1200" b="0">
                           <a:solidFill>
                             <a:srgbClr val="1A1A1A"/>
                           </a:solidFill>
@@ -6126,7 +6126,7 @@
                   </a:tcPr>
                 </a:tc>
               </a:tr>
-              <a:tr h="533400">
+              <a:tr h="535577">
                 <a:tc>
                   <a:txBody>
                     <a:bodyPr wrap="square"/>
@@ -6134,7 +6134,7 @@
                     <a:p>
                       <a:pPr algn="l"/>
                       <a:r>
-                        <a:rPr sz="1250" b="0">
+                        <a:rPr sz="1200" b="0">
                           <a:solidFill>
                             <a:srgbClr val="1A1A1A"/>
                           </a:solidFill>
@@ -6159,7 +6159,7 @@
                     <a:p>
                       <a:pPr algn="ctr"/>
                       <a:r>
-                        <a:rPr sz="1250" b="0">
+                        <a:rPr sz="1200" b="0">
                           <a:solidFill>
                             <a:srgbClr val="1A1A1A"/>
                           </a:solidFill>
@@ -6184,7 +6184,7 @@
                     <a:p>
                       <a:pPr algn="ctr"/>
                       <a:r>
-                        <a:rPr sz="1250" b="0">
+                        <a:rPr sz="1200" b="0">
                           <a:solidFill>
                             <a:srgbClr val="1A1A1A"/>
                           </a:solidFill>
@@ -6209,7 +6209,7 @@
                     <a:p>
                       <a:pPr algn="ctr"/>
                       <a:r>
-                        <a:rPr sz="1250" b="0">
+                        <a:rPr sz="1200" b="0">
                           <a:solidFill>
                             <a:srgbClr val="1A1A1A"/>
                           </a:solidFill>
@@ -6228,7 +6228,7 @@
                   </a:tcPr>
                 </a:tc>
               </a:tr>
-              <a:tr h="533400">
+              <a:tr h="535577">
                 <a:tc>
                   <a:txBody>
                     <a:bodyPr wrap="square"/>
@@ -6236,7 +6236,7 @@
                     <a:p>
                       <a:pPr algn="l"/>
                       <a:r>
-                        <a:rPr sz="1250" b="0">
+                        <a:rPr sz="1200" b="0">
                           <a:solidFill>
                             <a:srgbClr val="1A1A1A"/>
                           </a:solidFill>
@@ -6261,7 +6261,7 @@
                     <a:p>
                       <a:pPr algn="ctr"/>
                       <a:r>
-                        <a:rPr sz="1250" b="0">
+                        <a:rPr sz="1200" b="0">
                           <a:solidFill>
                             <a:srgbClr val="1A1A1A"/>
                           </a:solidFill>
@@ -6286,7 +6286,7 @@
                     <a:p>
                       <a:pPr algn="ctr"/>
                       <a:r>
-                        <a:rPr sz="1250" b="0">
+                        <a:rPr sz="1200" b="0">
                           <a:solidFill>
                             <a:srgbClr val="1A1A1A"/>
                           </a:solidFill>
@@ -6311,7 +6311,7 @@
                     <a:p>
                       <a:pPr algn="ctr"/>
                       <a:r>
-                        <a:rPr sz="1250" b="0">
+                        <a:rPr sz="1200" b="0">
                           <a:solidFill>
                             <a:srgbClr val="1A1A1A"/>
                           </a:solidFill>
@@ -6330,7 +6330,7 @@
                   </a:tcPr>
                 </a:tc>
               </a:tr>
-              <a:tr h="533400">
+              <a:tr h="535577">
                 <a:tc>
                   <a:txBody>
                     <a:bodyPr wrap="square"/>
@@ -6338,7 +6338,7 @@
                     <a:p>
                       <a:pPr algn="l"/>
                       <a:r>
-                        <a:rPr sz="1250" b="0">
+                        <a:rPr sz="1200" b="0">
                           <a:solidFill>
                             <a:srgbClr val="1A1A1A"/>
                           </a:solidFill>
@@ -6363,7 +6363,7 @@
                     <a:p>
                       <a:pPr algn="ctr"/>
                       <a:r>
-                        <a:rPr sz="1250" b="0">
+                        <a:rPr sz="1200" b="0">
                           <a:solidFill>
                             <a:srgbClr val="1A1A1A"/>
                           </a:solidFill>
@@ -6388,7 +6388,7 @@
                     <a:p>
                       <a:pPr algn="ctr"/>
                       <a:r>
-                        <a:rPr sz="1250" b="0">
+                        <a:rPr sz="1200" b="0">
                           <a:solidFill>
                             <a:srgbClr val="1A1A1A"/>
                           </a:solidFill>
@@ -6413,7 +6413,7 @@
                     <a:p>
                       <a:pPr algn="ctr"/>
                       <a:r>
-                        <a:rPr sz="1250" b="0">
+                        <a:rPr sz="1200" b="0">
                           <a:solidFill>
                             <a:srgbClr val="1A1A1A"/>
                           </a:solidFill>
@@ -6432,7 +6432,7 @@
                   </a:tcPr>
                 </a:tc>
               </a:tr>
-              <a:tr h="533400">
+              <a:tr h="535577">
                 <a:tc>
                   <a:txBody>
                     <a:bodyPr wrap="square"/>
@@ -6440,7 +6440,7 @@
                     <a:p>
                       <a:pPr algn="l"/>
                       <a:r>
-                        <a:rPr sz="1250" b="0">
+                        <a:rPr sz="1200" b="0">
                           <a:solidFill>
                             <a:srgbClr val="1A1A1A"/>
                           </a:solidFill>
@@ -6465,7 +6465,7 @@
                     <a:p>
                       <a:pPr algn="ctr"/>
                       <a:r>
-                        <a:rPr sz="1250" b="0">
+                        <a:rPr sz="1200" b="0">
                           <a:solidFill>
                             <a:srgbClr val="1A1A1A"/>
                           </a:solidFill>
@@ -6490,7 +6490,7 @@
                     <a:p>
                       <a:pPr algn="ctr"/>
                       <a:r>
-                        <a:rPr sz="1250" b="0">
+                        <a:rPr sz="1200" b="0">
                           <a:solidFill>
                             <a:srgbClr val="1A1A1A"/>
                           </a:solidFill>
@@ -6515,7 +6515,7 @@
                     <a:p>
                       <a:pPr algn="ctr"/>
                       <a:r>
-                        <a:rPr sz="1250" b="0">
+                        <a:rPr sz="1200" b="0">
                           <a:solidFill>
                             <a:srgbClr val="1A1A1A"/>
                           </a:solidFill>
@@ -6530,6 +6530,108 @@
                   <a:tcPr marL="64008" marR="64008" marT="27432" marB="27432" anchor="ctr">
                     <a:solidFill>
                       <a:srgbClr val="FFFFFF"/>
+                    </a:solidFill>
+                  </a:tcPr>
+                </a:tc>
+              </a:tr>
+              <a:tr h="535577">
+                <a:tc>
+                  <a:txBody>
+                    <a:bodyPr wrap="square"/>
+                    <a:lstStyle/>
+                    <a:p>
+                      <a:pPr algn="l"/>
+                      <a:r>
+                        <a:rPr sz="1200" b="0">
+                          <a:solidFill>
+                            <a:srgbClr val="1A1A1A"/>
+                          </a:solidFill>
+                          <a:latin typeface="Microsoft YaHei"/>
+                          <a:ea typeface="Microsoft YaHei"/>
+                          <a:cs typeface="Microsoft YaHei"/>
+                        </a:rPr>
+                        <a:t>生成内容标识办法（2025-09-01 施行）</a:t>
+                      </a:r>
+                    </a:p>
+                  </a:txBody>
+                  <a:tcPr marL="64008" marR="64008" marT="27432" marB="27432" anchor="ctr">
+                    <a:solidFill>
+                      <a:srgbClr val="F4F1EC"/>
+                    </a:solidFill>
+                  </a:tcPr>
+                </a:tc>
+                <a:tc>
+                  <a:txBody>
+                    <a:bodyPr wrap="square"/>
+                    <a:lstStyle/>
+                    <a:p>
+                      <a:pPr algn="ctr"/>
+                      <a:r>
+                        <a:rPr sz="1200" b="0">
+                          <a:solidFill>
+                            <a:srgbClr val="1A1A1A"/>
+                          </a:solidFill>
+                          <a:latin typeface="Microsoft YaHei"/>
+                          <a:ea typeface="Microsoft YaHei"/>
+                          <a:cs typeface="Microsoft YaHei"/>
+                        </a:rPr>
+                        <a:t>第四条(三)图片显式标识·第五条元数据隐式标识·第六条平台须核验</a:t>
+                      </a:r>
+                    </a:p>
+                  </a:txBody>
+                  <a:tcPr marL="64008" marR="64008" marT="27432" marB="27432" anchor="ctr">
+                    <a:solidFill>
+                      <a:srgbClr val="F4F1EC"/>
+                    </a:solidFill>
+                  </a:tcPr>
+                </a:tc>
+                <a:tc>
+                  <a:txBody>
+                    <a:bodyPr wrap="square"/>
+                    <a:lstStyle/>
+                    <a:p>
+                      <a:pPr algn="ctr"/>
+                      <a:r>
+                        <a:rPr sz="1200" b="0">
+                          <a:solidFill>
+                            <a:srgbClr val="1A1A1A"/>
+                          </a:solidFill>
+                          <a:latin typeface="Microsoft YaHei"/>
+                          <a:ea typeface="Microsoft YaHei"/>
+                          <a:cs typeface="Microsoft YaHei"/>
+                        </a:rPr>
+                        <a:t>依办法处罚</a:t>
+                      </a:r>
+                    </a:p>
+                  </a:txBody>
+                  <a:tcPr marL="64008" marR="64008" marT="27432" marB="27432" anchor="ctr">
+                    <a:solidFill>
+                      <a:srgbClr val="F4F1EC"/>
+                    </a:solidFill>
+                  </a:tcPr>
+                </a:tc>
+                <a:tc>
+                  <a:txBody>
+                    <a:bodyPr wrap="square"/>
+                    <a:lstStyle/>
+                    <a:p>
+                      <a:pPr algn="ctr"/>
+                      <a:r>
+                        <a:rPr sz="1200" b="0">
+                          <a:solidFill>
+                            <a:srgbClr val="1A1A1A"/>
+                          </a:solidFill>
+                          <a:latin typeface="Microsoft YaHei"/>
+                          <a:ea typeface="Microsoft YaHei"/>
+                          <a:cs typeface="Microsoft YaHei"/>
+                        </a:rPr>
+                        <a:t>直接对应第九件 ai_label + c2pa；GB 45438—2025 强制国标同步</a:t>
+                      </a:r>
+                    </a:p>
+                  </a:txBody>
+                  <a:tcPr marL="64008" marR="64008" marT="27432" marB="27432" anchor="ctr">
+                    <a:solidFill>
+                      <a:srgbClr val="F4F1EC"/>
                     </a:solidFill>
                   </a:tcPr>
                 </a:tc>
@@ -6546,8 +6648,8 @@
         </p:nvSpPr>
         <p:spPr>
           <a:xfrm>
-            <a:off x="457200" y="5212080"/>
-            <a:ext cx="5486400" cy="1371600"/>
+            <a:off x="457200" y="5715000"/>
+            <a:ext cx="5486400" cy="960120"/>
           </a:xfrm>
           <a:prstGeom prst="roundRect">
             <a:avLst/>
@@ -6590,8 +6692,8 @@
         </p:nvSpPr>
         <p:spPr>
           <a:xfrm>
-            <a:off x="457200" y="5212080"/>
-            <a:ext cx="82296" cy="1371600"/>
+            <a:off x="457200" y="5715000"/>
+            <a:ext cx="82296" cy="960120"/>
           </a:xfrm>
           <a:prstGeom prst="roundRect">
             <a:avLst/>
@@ -6634,8 +6736,8 @@
         </p:nvSpPr>
         <p:spPr>
           <a:xfrm>
-            <a:off x="658368" y="5285232"/>
-            <a:ext cx="5175504" cy="1225296"/>
+            <a:off x="658368" y="5788152"/>
+            <a:ext cx="5175504" cy="813816"/>
           </a:xfrm>
           <a:prstGeom prst="rect">
             <a:avLst/>
@@ -6654,7 +6756,7 @@
               </a:lnSpc>
             </a:pPr>
             <a:r>
-              <a:rPr sz="1400" b="0">
+              <a:rPr sz="1300" b="0">
                 <a:solidFill>
                   <a:srgbClr val="1A1A1A"/>
                 </a:solidFill>
@@ -6672,7 +6774,7 @@
               </a:lnSpc>
             </a:pPr>
             <a:r>
-              <a:rPr sz="1400" b="0">
+              <a:rPr sz="1300" b="0">
                 <a:solidFill>
                   <a:srgbClr val="1A1A1A"/>
                 </a:solidFill>
@@ -6690,7 +6792,7 @@
               </a:lnSpc>
             </a:pPr>
             <a:r>
-              <a:rPr sz="1400" b="0">
+              <a:rPr sz="1300" b="0">
                 <a:solidFill>
                   <a:srgbClr val="1A1A1A"/>
                 </a:solidFill>
@@ -6711,8 +6813,8 @@
         </p:nvSpPr>
         <p:spPr>
           <a:xfrm>
-            <a:off x="6172200" y="5212080"/>
-            <a:ext cx="5532120" cy="1371600"/>
+            <a:off x="6172200" y="5715000"/>
+            <a:ext cx="5532120" cy="960120"/>
           </a:xfrm>
           <a:prstGeom prst="roundRect">
             <a:avLst/>
@@ -6755,8 +6857,8 @@
         </p:nvSpPr>
         <p:spPr>
           <a:xfrm>
-            <a:off x="6172200" y="5212080"/>
-            <a:ext cx="82296" cy="1371600"/>
+            <a:off x="6172200" y="5715000"/>
+            <a:ext cx="82296" cy="960120"/>
           </a:xfrm>
           <a:prstGeom prst="roundRect">
             <a:avLst/>
@@ -6799,8 +6901,8 @@
         </p:nvSpPr>
         <p:spPr>
           <a:xfrm>
-            <a:off x="6373368" y="5285232"/>
-            <a:ext cx="5221224" cy="1225296"/>
+            <a:off x="6373368" y="5788152"/>
+            <a:ext cx="5221224" cy="813816"/>
           </a:xfrm>
           <a:prstGeom prst="rect">
             <a:avLst/>
@@ -6819,7 +6921,7 @@
               </a:lnSpc>
             </a:pPr>
             <a:r>
-              <a:rPr sz="1400" b="0">
+              <a:rPr sz="1300" b="0">
                 <a:solidFill>
                   <a:srgbClr val="FFFFFF"/>
                 </a:solidFill>
@@ -6837,7 +6939,7 @@
               </a:lnSpc>
             </a:pPr>
             <a:r>
-              <a:rPr sz="1400" b="0">
+              <a:rPr sz="1300" b="0">
                 <a:solidFill>
                   <a:srgbClr val="FFFFFF"/>
                 </a:solidFill>
@@ -8205,7 +8307,7 @@
                 <a:ea typeface="Microsoft YaHei"/>
                 <a:cs typeface="Microsoft YaHei"/>
               </a:rPr>
-              <a:t>方法严谨性 + 技术创新（第九件工具 ai_label）</a:t>
+              <a:t>方法严谨性 + 技术创新（第九件工具 ai_label，对应《标识办法》第四条(三)）</a:t>
             </a:r>
           </a:p>
         </p:txBody>
@@ -8914,7 +9016,7 @@
                 <a:ea typeface="Microsoft YaHei"/>
                 <a:cs typeface="Microsoft YaHei"/>
               </a:rPr>
-              <a:t>● 诚实边界：标识可被伪造/贴图；洗掉标识再发布的 AI 图本工具发现不了 —— 标识层是补偿，不是替代，那类图仍靠 AIGC + 频域 + TruFor；这批评测图带平台水印，本身有偏，不能当生产准确率。</a:t>
+              <a:t>● 诚实边界：标识可被伪造/贴图；洗掉标识再发布的 AI 图本工具发现不了 —— 标识层是补偿，不是替代，那类图仍靠 AIGC + 频域 + TruFor；需说明：依《标识办法》第十条，恶意删除/伪造/隐匿标识本身即违规，本工具只做「发现」不做法务判定。</a:t>
             </a:r>
           </a:p>
           <a:p>
@@ -9931,6 +10033,27 @@
                 <a:cs typeface="Microsoft YaHei"/>
               </a:rPr>
               <a:t>● 真实世界口径用 2026-09-26 那批真图.zip 34 张的实测（v4 误报 5.9%），不再引用早期的 66%。</a:t>
+            </a:r>
+          </a:p>
+          <a:p>
+            <a:pPr>
+              <a:lnSpc>
+                <a:spcPct val="108000"/>
+              </a:lnSpc>
+              <a:spcAft>
+                <a:spcPts val="700"/>
+              </a:spcAft>
+            </a:pPr>
+            <a:r>
+              <a:rPr sz="1400">
+                <a:solidFill>
+                  <a:srgbClr val="1A1A1A"/>
+                </a:solidFill>
+                <a:latin typeface="Microsoft YaHei"/>
+                <a:ea typeface="Microsoft YaHei"/>
+                <a:cs typeface="Microsoft YaHei"/>
+              </a:rPr>
+              <a:t>● 误报才是真危害：竞品真实照片被误判 AI 的案例屡见不鲜（Netanyahu 照片、ZeroGPT 40% 误报）；我们自动下架误伤 0/20，宁可转人工也不错杀。</a:t>
             </a:r>
           </a:p>
         </p:txBody>
@@ -11290,7 +11413,7 @@
                 <a:ea typeface="Microsoft YaHei"/>
                 <a:cs typeface="Microsoft YaHei"/>
               </a:rPr>
-              <a:t>诚实边界：第 2/3/5 项是估算（已给推导链与敏感性）；第 1/4 项为官方一手口径。评委问「哪个数是你编的」，我们答得出来。</a:t>
+              <a:t>诚实边界：第 2/3/5 项是估算（已给推导链与敏感性）；第 1/4 项为官方一手口径。补充：中国 AI 内容审核市场 2026 约 8.7 亿美元（第三方测算），美妆×内容风控是其高价值子集。</a:t>
             </a:r>
           </a:p>
         </p:txBody>
@@ -11478,7 +11601,7 @@
                 <a:ea typeface="Microsoft YaHei"/>
                 <a:cs typeface="Microsoft YaHei"/>
               </a:rPr>
-              <a:t>● 短期（0–6 月）：品牌内审插件 / 私有化 API —— Web 取证台 + Flask API 已就绪，纯 CPU 可跑。</a:t>
+              <a:t>● 短期（0–6 月）：面向内容平台与品牌方的核验环节 —— Web 取证台 + Flask API 已就绪，纯 CPU 可跑；对应《标识办法》第六条平台核验义务。</a:t>
             </a:r>
           </a:p>
           <a:p>
@@ -14132,6 +14255,27 @@
                 <a:cs typeface="Microsoft YaHei"/>
               </a:rPr>
               <a:t>● 纯 CPU 可跑、开源可复现、训练数据 100% 团队自产；已上线在线 Demo。</a:t>
+            </a:r>
+          </a:p>
+          <a:p>
+            <a:pPr>
+              <a:lnSpc>
+                <a:spcPct val="108000"/>
+              </a:lnSpc>
+              <a:spcAft>
+                <a:spcPts val="700"/>
+              </a:spcAft>
+            </a:pPr>
+            <a:r>
+              <a:rPr sz="1600">
+                <a:solidFill>
+                  <a:srgbClr val="1A1A1A"/>
+                </a:solidFill>
+                <a:latin typeface="Microsoft YaHei"/>
+                <a:ea typeface="Microsoft YaHei"/>
+                <a:cs typeface="Microsoft YaHei"/>
+              </a:rPr>
+              <a:t>● 行业共识：没有任何单一工具能平等覆盖所有生成器 —— 做三轴不是堆料，是必然。</a:t>
             </a:r>
           </a:p>
         </p:txBody>

--- a/docs/BeautyProof_答辩PPT.pptx
+++ b/docs/BeautyProof_答辩PPT.pptx
@@ -14672,7 +14672,7 @@
                 <a:ea typeface="Microsoft YaHei"/>
                 <a:cs typeface="Microsoft YaHei"/>
               </a:rPr>
-              <a:t>仍需补齐的清单（按对获奖的影响排序）</a:t>
+              <a:t>提交前状态清单：做完的 / 仍缺的</a:t>
             </a:r>
           </a:p>
         </p:txBody>
@@ -14713,7 +14713,7 @@
                 <a:ea typeface="Microsoft YaHei"/>
                 <a:cs typeface="Microsoft YaHei"/>
               </a:rPr>
-              <a:t>诚实列出，并说明补齐后能换多少分</a:t>
+              <a:t>4 项已闭环、4 项到提交前仍缺 —— 照实列出</a:t>
             </a:r>
           </a:p>
         </p:txBody>
@@ -14728,7 +14728,7 @@
         </p:nvGraphicFramePr>
         <p:xfrm>
           <a:off x="457200" y="1828800"/>
-          <a:ext cx="11247118" cy="3291840"/>
+          <a:ext cx="11247118" cy="3931920"/>
         </p:xfrm>
         <a:graphic>
           <a:graphicData uri="http://schemas.openxmlformats.org/drawingml/2006/table">
@@ -14737,12 +14737,12 @@
                 <a:tableStyleId>{5C22544A-7EE6-4342-B048-85BDC9FD1C3A}</a:tableStyleId>
               </a:tblPr>
               <a:tblGrid>
-                <a:gridCol w="1012240"/>
-                <a:gridCol w="3036722"/>
-                <a:gridCol w="2924251"/>
-                <a:gridCol w="4273905"/>
+                <a:gridCol w="787298"/>
+                <a:gridCol w="3149193"/>
+                <a:gridCol w="3711549"/>
+                <a:gridCol w="3599078"/>
               </a:tblGrid>
-              <a:tr h="470262">
+              <a:tr h="491490">
                 <a:tc>
                   <a:txBody>
                     <a:bodyPr wrap="square"/>
@@ -14758,7 +14758,7 @@
                           <a:ea typeface="Microsoft YaHei"/>
                           <a:cs typeface="Microsoft YaHei"/>
                         </a:rPr>
-                        <a:t>优先级</a:t>
+                        <a:t>状态</a:t>
                       </a:r>
                     </a:p>
                   </a:txBody>
@@ -14833,7 +14833,7 @@
                           <a:ea typeface="Microsoft YaHei"/>
                           <a:cs typeface="Microsoft YaHei"/>
                         </a:rPr>
-                        <a:t>补齐后影响</a:t>
+                        <a:t>对评审的影响</a:t>
                       </a:r>
                     </a:p>
                   </a:txBody>
@@ -14844,7 +14844,7 @@
                   </a:tcPr>
                 </a:tc>
               </a:tr>
-              <a:tr h="470262">
+              <a:tr h="491490">
                 <a:tc>
                   <a:txBody>
                     <a:bodyPr wrap="square"/>
@@ -14852,15 +14852,15 @@
                     <a:p>
                       <a:pPr algn="l"/>
                       <a:r>
-                        <a:rPr sz="1300" b="0">
-                          <a:solidFill>
-                            <a:srgbClr val="1A1A1A"/>
-                          </a:solidFill>
-                          <a:latin typeface="Microsoft YaHei"/>
-                          <a:ea typeface="Microsoft YaHei"/>
-                          <a:cs typeface="Microsoft YaHei"/>
-                        </a:rPr>
-                        <a:t>🛡 1</a:t>
+                        <a:rPr sz="1250" b="0">
+                          <a:solidFill>
+                            <a:srgbClr val="1A1A1A"/>
+                          </a:solidFill>
+                          <a:latin typeface="Microsoft YaHei"/>
+                          <a:ea typeface="Microsoft YaHei"/>
+                          <a:cs typeface="Microsoft YaHei"/>
+                        </a:rPr>
+                        <a:t>✅</a:t>
                       </a:r>
                     </a:p>
                   </a:txBody>
@@ -14877,15 +14877,15 @@
                     <a:p>
                       <a:pPr algn="ctr"/>
                       <a:r>
-                        <a:rPr sz="1300" b="0">
-                          <a:solidFill>
-                            <a:srgbClr val="1A1A1A"/>
-                          </a:solidFill>
-                          <a:latin typeface="Microsoft YaHei"/>
-                          <a:ea typeface="Microsoft YaHei"/>
-                          <a:cs typeface="Microsoft YaHei"/>
-                        </a:rPr>
-                        <a:t>演示视频重录（2 分 20 秒）</a:t>
+                        <a:rPr sz="1250" b="0">
+                          <a:solidFill>
+                            <a:srgbClr val="1A1A1A"/>
+                          </a:solidFill>
+                          <a:latin typeface="Microsoft YaHei"/>
+                          <a:ea typeface="Microsoft YaHei"/>
+                          <a:cs typeface="Microsoft YaHei"/>
+                        </a:rPr>
+                        <a:t>演示视频（2 分 41 秒 / 12 屏）</a:t>
                       </a:r>
                     </a:p>
                   </a:txBody>
@@ -14902,15 +14902,15 @@
                     <a:p>
                       <a:pPr algn="ctr"/>
                       <a:r>
-                        <a:rPr sz="1300" b="0">
-                          <a:solidFill>
-                            <a:srgbClr val="1A1A1A"/>
-                          </a:solidFill>
-                          <a:latin typeface="Microsoft YaHei"/>
-                          <a:ea typeface="Microsoft YaHei"/>
-                          <a:cs typeface="Microsoft YaHei"/>
-                        </a:rPr>
-                        <a:t>现版本是灰带之前的旧稿</a:t>
+                        <a:rPr sz="1250" b="0">
+                          <a:solidFill>
+                            <a:srgbClr val="1A1A1A"/>
+                          </a:solidFill>
+                          <a:latin typeface="Microsoft YaHei"/>
+                          <a:ea typeface="Microsoft YaHei"/>
+                          <a:cs typeface="Microsoft YaHei"/>
+                        </a:rPr>
+                        <a:t>10/05 已按最新走查页重录；11 处切屏点与口播时间轴逐一吻合</a:t>
                       </a:r>
                     </a:p>
                   </a:txBody>
@@ -14927,15 +14927,15 @@
                     <a:p>
                       <a:pPr algn="ctr"/>
                       <a:r>
-                        <a:rPr sz="1300" b="0">
-                          <a:solidFill>
-                            <a:srgbClr val="1A1A1A"/>
-                          </a:solidFill>
-                          <a:latin typeface="Microsoft YaHei"/>
-                          <a:ea typeface="Microsoft YaHei"/>
-                          <a:cs typeface="Microsoft YaHei"/>
-                        </a:rPr>
-                        <a:t>演示材料是初赛三交付物之一，直接影响观感分</a:t>
+                        <a:rPr sz="1250" b="0">
+                          <a:solidFill>
+                            <a:srgbClr val="1A1A1A"/>
+                          </a:solidFill>
+                          <a:latin typeface="Microsoft YaHei"/>
+                          <a:ea typeface="Microsoft YaHei"/>
+                          <a:cs typeface="Microsoft YaHei"/>
+                        </a:rPr>
+                        <a:t>初赛三交付物之一，已闭环</a:t>
                       </a:r>
                     </a:p>
                   </a:txBody>
@@ -14946,7 +14946,7 @@
                   </a:tcPr>
                 </a:tc>
               </a:tr>
-              <a:tr h="470262">
+              <a:tr h="491490">
                 <a:tc>
                   <a:txBody>
                     <a:bodyPr wrap="square"/>
@@ -14954,15 +14954,15 @@
                     <a:p>
                       <a:pPr algn="l"/>
                       <a:r>
-                        <a:rPr sz="1300" b="0">
-                          <a:solidFill>
-                            <a:srgbClr val="1A1A1A"/>
-                          </a:solidFill>
-                          <a:latin typeface="Microsoft YaHei"/>
-                          <a:ea typeface="Microsoft YaHei"/>
-                          <a:cs typeface="Microsoft YaHei"/>
-                        </a:rPr>
-                        <a:t>🛡 2</a:t>
+                        <a:rPr sz="1250" b="0">
+                          <a:solidFill>
+                            <a:srgbClr val="1A1A1A"/>
+                          </a:solidFill>
+                          <a:latin typeface="Microsoft YaHei"/>
+                          <a:ea typeface="Microsoft YaHei"/>
+                          <a:cs typeface="Microsoft YaHei"/>
+                        </a:rPr>
+                        <a:t>✅</a:t>
                       </a:r>
                     </a:p>
                   </a:txBody>
@@ -14979,15 +14979,15 @@
                     <a:p>
                       <a:pPr algn="ctr"/>
                       <a:r>
-                        <a:rPr sz="1300" b="0">
-                          <a:solidFill>
-                            <a:srgbClr val="1A1A1A"/>
-                          </a:solidFill>
-                          <a:latin typeface="Microsoft YaHei"/>
-                          <a:ea typeface="Microsoft YaHei"/>
-                          <a:cs typeface="Microsoft YaHei"/>
-                        </a:rPr>
-                        <a:t>PPT 同步本轮新增内容</a:t>
+                        <a:rPr sz="1250" b="0">
+                          <a:solidFill>
+                            <a:srgbClr val="1A1A1A"/>
+                          </a:solidFill>
+                          <a:latin typeface="Microsoft YaHei"/>
+                          <a:ea typeface="Microsoft YaHei"/>
+                          <a:cs typeface="Microsoft YaHei"/>
+                        </a:rPr>
+                        <a:t>PPT 21 页（封面 / 结尾主视觉 + 法规对齐）</a:t>
                       </a:r>
                     </a:p>
                   </a:txBody>
@@ -15004,15 +15004,15 @@
                     <a:p>
                       <a:pPr algn="ctr"/>
                       <a:r>
-                        <a:rPr sz="1300" b="0">
-                          <a:solidFill>
-                            <a:srgbClr val="1A1A1A"/>
-                          </a:solidFill>
-                          <a:latin typeface="Microsoft YaHei"/>
-                          <a:ea typeface="Microsoft YaHei"/>
-                          <a:cs typeface="Microsoft YaHei"/>
-                        </a:rPr>
-                        <a:t>本轮已完成（本文档）</a:t>
+                        <a:rPr sz="1250" b="0">
+                          <a:solidFill>
+                            <a:srgbClr val="1A1A1A"/>
+                          </a:solidFill>
+                          <a:latin typeface="Microsoft YaHei"/>
+                          <a:ea typeface="Microsoft YaHei"/>
+                          <a:cs typeface="Microsoft YaHei"/>
+                        </a:rPr>
+                        <a:t>10/03–10/05 四轮更新完毕</a:t>
                       </a:r>
                     </a:p>
                   </a:txBody>
@@ -15029,15 +15029,15 @@
                     <a:p>
                       <a:pPr algn="ctr"/>
                       <a:r>
-                        <a:rPr sz="1300" b="0">
-                          <a:solidFill>
-                            <a:srgbClr val="1A1A1A"/>
-                          </a:solidFill>
-                          <a:latin typeface="Microsoft YaHei"/>
-                          <a:ea typeface="Microsoft YaHei"/>
-                          <a:cs typeface="Microsoft YaHei"/>
-                        </a:rPr>
-                        <a:t>初赛三交付物之一</a:t>
+                        <a:rPr sz="1250" b="0">
+                          <a:solidFill>
+                            <a:srgbClr val="1A1A1A"/>
+                          </a:solidFill>
+                          <a:latin typeface="Microsoft YaHei"/>
+                          <a:ea typeface="Microsoft YaHei"/>
+                          <a:cs typeface="Microsoft YaHei"/>
+                        </a:rPr>
+                        <a:t>初赛三交付物之一，已闭环</a:t>
                       </a:r>
                     </a:p>
                   </a:txBody>
@@ -15048,7 +15048,7 @@
                   </a:tcPr>
                 </a:tc>
               </a:tr>
-              <a:tr h="470262">
+              <a:tr h="491490">
                 <a:tc>
                   <a:txBody>
                     <a:bodyPr wrap="square"/>
@@ -15056,15 +15056,15 @@
                     <a:p>
                       <a:pPr algn="l"/>
                       <a:r>
-                        <a:rPr sz="1300" b="0">
-                          <a:solidFill>
-                            <a:srgbClr val="1A1A1A"/>
-                          </a:solidFill>
-                          <a:latin typeface="Microsoft YaHei"/>
-                          <a:ea typeface="Microsoft YaHei"/>
-                          <a:cs typeface="Microsoft YaHei"/>
-                        </a:rPr>
-                        <a:t>①</a:t>
+                        <a:rPr sz="1250" b="0">
+                          <a:solidFill>
+                            <a:srgbClr val="1A1A1A"/>
+                          </a:solidFill>
+                          <a:latin typeface="Microsoft YaHei"/>
+                          <a:ea typeface="Microsoft YaHei"/>
+                          <a:cs typeface="Microsoft YaHei"/>
+                        </a:rPr>
+                        <a:t>✅</a:t>
                       </a:r>
                     </a:p>
                   </a:txBody>
@@ -15081,7 +15081,109 @@
                     <a:p>
                       <a:pPr algn="ctr"/>
                       <a:r>
-                        <a:rPr sz="1300" b="0">
+                        <a:rPr sz="1250" b="0">
+                          <a:solidFill>
+                            <a:srgbClr val="1A1A1A"/>
+                          </a:solidFill>
+                          <a:latin typeface="Microsoft YaHei"/>
+                          <a:ea typeface="Microsoft YaHei"/>
+                          <a:cs typeface="Microsoft YaHei"/>
+                        </a:rPr>
+                        <a:t>测试数据包 10 个样本</a:t>
+                      </a:r>
+                    </a:p>
+                  </a:txBody>
+                  <a:tcPr marL="64008" marR="64008" marT="27432" marB="27432" anchor="ctr">
+                    <a:solidFill>
+                      <a:srgbClr val="FFFFFF"/>
+                    </a:solidFill>
+                  </a:tcPr>
+                </a:tc>
+                <a:tc>
+                  <a:txBody>
+                    <a:bodyPr wrap="square"/>
+                    <a:lstStyle/>
+                    <a:p>
+                      <a:pPr algn="ctr"/>
+                      <a:r>
+                        <a:rPr sz="1250" b="0">
+                          <a:solidFill>
+                            <a:srgbClr val="1A1A1A"/>
+                          </a:solidFill>
+                          <a:latin typeface="Microsoft YaHei"/>
+                          <a:ea typeface="Microsoft YaHei"/>
+                          <a:cs typeface="Microsoft YaHei"/>
+                        </a:rPr>
+                        <a:t>覆盖官方两个场景：种草文案图文交叉 + 评论区真实性核验</a:t>
+                      </a:r>
+                    </a:p>
+                  </a:txBody>
+                  <a:tcPr marL="64008" marR="64008" marT="27432" marB="27432" anchor="ctr">
+                    <a:solidFill>
+                      <a:srgbClr val="FFFFFF"/>
+                    </a:solidFill>
+                  </a:tcPr>
+                </a:tc>
+                <a:tc>
+                  <a:txBody>
+                    <a:bodyPr wrap="square"/>
+                    <a:lstStyle/>
+                    <a:p>
+                      <a:pPr algn="ctr"/>
+                      <a:r>
+                        <a:rPr sz="1250" b="0">
+                          <a:solidFill>
+                            <a:srgbClr val="1A1A1A"/>
+                          </a:solidFill>
+                          <a:latin typeface="Microsoft YaHei"/>
+                          <a:ea typeface="Microsoft YaHei"/>
+                          <a:cs typeface="Microsoft YaHei"/>
+                        </a:rPr>
+                        <a:t>初赛三交付物之一，「数据涵盖边缘场景」已补</a:t>
+                      </a:r>
+                    </a:p>
+                  </a:txBody>
+                  <a:tcPr marL="64008" marR="64008" marT="27432" marB="27432" anchor="ctr">
+                    <a:solidFill>
+                      <a:srgbClr val="FFFFFF"/>
+                    </a:solidFill>
+                  </a:tcPr>
+                </a:tc>
+              </a:tr>
+              <a:tr h="491490">
+                <a:tc>
+                  <a:txBody>
+                    <a:bodyPr wrap="square"/>
+                    <a:lstStyle/>
+                    <a:p>
+                      <a:pPr algn="l"/>
+                      <a:r>
+                        <a:rPr sz="1250" b="0">
+                          <a:solidFill>
+                            <a:srgbClr val="1A1A1A"/>
+                          </a:solidFill>
+                          <a:latin typeface="Microsoft YaHei"/>
+                          <a:ea typeface="Microsoft YaHei"/>
+                          <a:cs typeface="Microsoft YaHei"/>
+                        </a:rPr>
+                        <a:t>❌</a:t>
+                      </a:r>
+                    </a:p>
+                  </a:txBody>
+                  <a:tcPr marL="64008" marR="64008" marT="27432" marB="27432" anchor="ctr">
+                    <a:solidFill>
+                      <a:srgbClr val="F4F1EC"/>
+                    </a:solidFill>
+                  </a:tcPr>
+                </a:tc>
+                <a:tc>
+                  <a:txBody>
+                    <a:bodyPr wrap="square"/>
+                    <a:lstStyle/>
+                    <a:p>
+                      <a:pPr algn="ctr"/>
+                      <a:r>
+                        <a:rPr sz="1250" b="0">
                           <a:solidFill>
                             <a:srgbClr val="1A1A1A"/>
                           </a:solidFill>
@@ -15095,6 +15197,83 @@
                   </a:txBody>
                   <a:tcPr marL="64008" marR="64008" marT="27432" marB="27432" anchor="ctr">
                     <a:solidFill>
+                      <a:srgbClr val="F4F1EC"/>
+                    </a:solidFill>
+                  </a:tcPr>
+                </a:tc>
+                <a:tc>
+                  <a:txBody>
+                    <a:bodyPr wrap="square"/>
+                    <a:lstStyle/>
+                    <a:p>
+                      <a:pPr algn="ctr"/>
+                      <a:r>
+                        <a:rPr sz="1250" b="0">
+                          <a:solidFill>
+                            <a:srgbClr val="1A1A1A"/>
+                          </a:solidFill>
+                          <a:latin typeface="Microsoft YaHei"/>
+                          <a:ea typeface="Microsoft YaHei"/>
+                          <a:cs typeface="Microsoft YaHei"/>
+                        </a:rPr>
+                        <a:t>仍缺，仅 6 组合成案例</a:t>
+                      </a:r>
+                    </a:p>
+                  </a:txBody>
+                  <a:tcPr marL="64008" marR="64008" marT="27432" marB="27432" anchor="ctr">
+                    <a:solidFill>
+                      <a:srgbClr val="F4F1EC"/>
+                    </a:solidFill>
+                  </a:tcPr>
+                </a:tc>
+                <a:tc>
+                  <a:txBody>
+                    <a:bodyPr wrap="square"/>
+                    <a:lstStyle/>
+                    <a:p>
+                      <a:pPr algn="ctr"/>
+                      <a:r>
+                        <a:rPr sz="1250" b="0">
+                          <a:solidFill>
+                            <a:srgbClr val="1A1A1A"/>
+                          </a:solidFill>
+                          <a:latin typeface="Microsoft YaHei"/>
+                          <a:ea typeface="Microsoft YaHei"/>
+                          <a:cs typeface="Microsoft YaHei"/>
+                        </a:rPr>
+                        <a:t>最大失分项（SCALABLE 3/5），未补</a:t>
+                      </a:r>
+                    </a:p>
+                  </a:txBody>
+                  <a:tcPr marL="64008" marR="64008" marT="27432" marB="27432" anchor="ctr">
+                    <a:solidFill>
+                      <a:srgbClr val="F4F1EC"/>
+                    </a:solidFill>
+                  </a:tcPr>
+                </a:tc>
+              </a:tr>
+              <a:tr h="491490">
+                <a:tc>
+                  <a:txBody>
+                    <a:bodyPr wrap="square"/>
+                    <a:lstStyle/>
+                    <a:p>
+                      <a:pPr algn="l"/>
+                      <a:r>
+                        <a:rPr sz="1250" b="0">
+                          <a:solidFill>
+                            <a:srgbClr val="1A1A1A"/>
+                          </a:solidFill>
+                          <a:latin typeface="Microsoft YaHei"/>
+                          <a:ea typeface="Microsoft YaHei"/>
+                          <a:cs typeface="Microsoft YaHei"/>
+                        </a:rPr>
+                        <a:t>❌</a:t>
+                      </a:r>
+                    </a:p>
+                  </a:txBody>
+                  <a:tcPr marL="64008" marR="64008" marT="27432" marB="27432" anchor="ctr">
+                    <a:solidFill>
                       <a:srgbClr val="FFFFFF"/>
                     </a:solidFill>
                   </a:tcPr>
@@ -15106,15 +15285,15 @@
                     <a:p>
                       <a:pPr algn="ctr"/>
                       <a:r>
-                        <a:rPr sz="1300" b="0">
-                          <a:solidFill>
-                            <a:srgbClr val="1A1A1A"/>
-                          </a:solidFill>
-                          <a:latin typeface="Microsoft YaHei"/>
-                          <a:ea typeface="Microsoft YaHei"/>
-                          <a:cs typeface="Microsoft YaHei"/>
-                        </a:rPr>
-                        <a:t>仅 6 组合成案例</a:t>
+                        <a:rPr sz="1250" b="0">
+                          <a:solidFill>
+                            <a:srgbClr val="1A1A1A"/>
+                          </a:solidFill>
+                          <a:latin typeface="Microsoft YaHei"/>
+                          <a:ea typeface="Microsoft YaHei"/>
+                          <a:cs typeface="Microsoft YaHei"/>
+                        </a:rPr>
+                        <a:t>MJ / SD / Flux 原生图各 10 张</a:t>
                       </a:r>
                     </a:p>
                   </a:txBody>
@@ -15131,15 +15310,15 @@
                     <a:p>
                       <a:pPr algn="ctr"/>
                       <a:r>
-                        <a:rPr sz="1300" b="0">
-                          <a:solidFill>
-                            <a:srgbClr val="1A1A1A"/>
-                          </a:solidFill>
-                          <a:latin typeface="Microsoft YaHei"/>
-                          <a:ea typeface="Microsoft YaHei"/>
-                          <a:cs typeface="Microsoft YaHei"/>
-                        </a:rPr>
-                        <a:t>直接补 SCALABLE 的短板，是最大失分项</a:t>
+                        <a:rPr sz="1250" b="0">
+                          <a:solidFill>
+                            <a:srgbClr val="1A1A1A"/>
+                          </a:solidFill>
+                          <a:latin typeface="Microsoft YaHei"/>
+                          <a:ea typeface="Microsoft YaHei"/>
+                          <a:cs typeface="Microsoft YaHei"/>
+                        </a:rPr>
+                        <a:t>仍缺，目前 4 + 1 张</a:t>
                       </a:r>
                     </a:p>
                   </a:txBody>
@@ -15149,8 +15328,33 @@
                     </a:solidFill>
                   </a:tcPr>
                 </a:tc>
+                <a:tc>
+                  <a:txBody>
+                    <a:bodyPr wrap="square"/>
+                    <a:lstStyle/>
+                    <a:p>
+                      <a:pPr algn="ctr"/>
+                      <a:r>
+                        <a:rPr sz="1250" b="0">
+                          <a:solidFill>
+                            <a:srgbClr val="1A1A1A"/>
+                          </a:solidFill>
+                          <a:latin typeface="Microsoft YaHei"/>
+                          <a:ea typeface="Microsoft YaHei"/>
+                          <a:cs typeface="Microsoft YaHei"/>
+                        </a:rPr>
+                        <a:t>跨生成器泛化结论的样本量受限</a:t>
+                      </a:r>
+                    </a:p>
+                  </a:txBody>
+                  <a:tcPr marL="64008" marR="64008" marT="27432" marB="27432" anchor="ctr">
+                    <a:solidFill>
+                      <a:srgbClr val="FFFFFF"/>
+                    </a:solidFill>
+                  </a:tcPr>
+                </a:tc>
               </a:tr>
-              <a:tr h="470262">
+              <a:tr h="491490">
                 <a:tc>
                   <a:txBody>
                     <a:bodyPr wrap="square"/>
@@ -15158,15 +15362,15 @@
                     <a:p>
                       <a:pPr algn="l"/>
                       <a:r>
-                        <a:rPr sz="1300" b="0">
-                          <a:solidFill>
-                            <a:srgbClr val="1A1A1A"/>
-                          </a:solidFill>
-                          <a:latin typeface="Microsoft YaHei"/>
-                          <a:ea typeface="Microsoft YaHei"/>
-                          <a:cs typeface="Microsoft YaHei"/>
-                        </a:rPr>
-                        <a:t>②</a:t>
+                        <a:rPr sz="1250" b="0">
+                          <a:solidFill>
+                            <a:srgbClr val="1A1A1A"/>
+                          </a:solidFill>
+                          <a:latin typeface="Microsoft YaHei"/>
+                          <a:ea typeface="Microsoft YaHei"/>
+                          <a:cs typeface="Microsoft YaHei"/>
+                        </a:rPr>
+                        <a:t>❌</a:t>
                       </a:r>
                     </a:p>
                   </a:txBody>
@@ -15183,15 +15387,15 @@
                     <a:p>
                       <a:pPr algn="ctr"/>
                       <a:r>
-                        <a:rPr sz="1300" b="0">
-                          <a:solidFill>
-                            <a:srgbClr val="1A1A1A"/>
-                          </a:solidFill>
-                          <a:latin typeface="Microsoft YaHei"/>
-                          <a:ea typeface="Microsoft YaHei"/>
-                          <a:cs typeface="Microsoft YaHei"/>
-                        </a:rPr>
-                        <a:t>MJ / SD / Flux 原生图各 10 张</a:t>
+                        <a:rPr sz="1250" b="0">
+                          <a:solidFill>
+                            <a:srgbClr val="1A1A1A"/>
+                          </a:solidFill>
+                          <a:latin typeface="Microsoft YaHei"/>
+                          <a:ea typeface="Microsoft YaHei"/>
+                          <a:cs typeface="Microsoft YaHei"/>
+                        </a:rPr>
+                        <a:t>品牌方侧真实预算 / 审一条耗时</a:t>
                       </a:r>
                     </a:p>
                   </a:txBody>
@@ -15208,15 +15412,15 @@
                     <a:p>
                       <a:pPr algn="ctr"/>
                       <a:r>
-                        <a:rPr sz="1300" b="0">
-                          <a:solidFill>
-                            <a:srgbClr val="1A1A1A"/>
-                          </a:solidFill>
-                          <a:latin typeface="Microsoft YaHei"/>
-                          <a:ea typeface="Microsoft YaHei"/>
-                          <a:cs typeface="Microsoft YaHei"/>
-                        </a:rPr>
-                        <a:t>目前 4 + 1 张</a:t>
+                        <a:rPr sz="1250" b="0">
+                          <a:solidFill>
+                            <a:srgbClr val="1A1A1A"/>
+                          </a:solidFill>
+                          <a:latin typeface="Microsoft YaHei"/>
+                          <a:ea typeface="Microsoft YaHei"/>
+                          <a:cs typeface="Microsoft YaHei"/>
+                        </a:rPr>
+                        <a:t>仍缺，只用了公开调研区间值</a:t>
                       </a:r>
                     </a:p>
                   </a:txBody>
@@ -15233,15 +15437,15 @@
                     <a:p>
                       <a:pPr algn="ctr"/>
                       <a:r>
-                        <a:rPr sz="1300" b="0">
-                          <a:solidFill>
-                            <a:srgbClr val="1A1A1A"/>
-                          </a:solidFill>
-                          <a:latin typeface="Microsoft YaHei"/>
-                          <a:ea typeface="Microsoft YaHei"/>
-                          <a:cs typeface="Microsoft YaHei"/>
-                        </a:rPr>
-                        <a:t>补跨生成器泛化结论的样本量</a:t>
+                        <a:rPr sz="1250" b="0">
+                          <a:solidFill>
+                            <a:srgbClr val="1A1A1A"/>
+                          </a:solidFill>
+                          <a:latin typeface="Microsoft YaHei"/>
+                          <a:ea typeface="Microsoft YaHei"/>
+                          <a:cs typeface="Microsoft YaHei"/>
+                        </a:rPr>
+                        <a:t>商业数字停留在「估算」档</a:t>
                       </a:r>
                     </a:p>
                   </a:txBody>
@@ -15252,7 +15456,7 @@
                   </a:tcPr>
                 </a:tc>
               </a:tr>
-              <a:tr h="470262">
+              <a:tr h="491490">
                 <a:tc>
                   <a:txBody>
                     <a:bodyPr wrap="square"/>
@@ -15260,15 +15464,15 @@
                     <a:p>
                       <a:pPr algn="l"/>
                       <a:r>
-                        <a:rPr sz="1300" b="0">
-                          <a:solidFill>
-                            <a:srgbClr val="1A1A1A"/>
-                          </a:solidFill>
-                          <a:latin typeface="Microsoft YaHei"/>
-                          <a:ea typeface="Microsoft YaHei"/>
-                          <a:cs typeface="Microsoft YaHei"/>
-                        </a:rPr>
-                        <a:t>③</a:t>
+                        <a:rPr sz="1250" b="0">
+                          <a:solidFill>
+                            <a:srgbClr val="1A1A1A"/>
+                          </a:solidFill>
+                          <a:latin typeface="Microsoft YaHei"/>
+                          <a:ea typeface="Microsoft YaHei"/>
+                          <a:cs typeface="Microsoft YaHei"/>
+                        </a:rPr>
+                        <a:t>❌</a:t>
                       </a:r>
                     </a:p>
                   </a:txBody>
@@ -15285,15 +15489,15 @@
                     <a:p>
                       <a:pPr algn="ctr"/>
                       <a:r>
-                        <a:rPr sz="1300" b="0">
-                          <a:solidFill>
-                            <a:srgbClr val="1A1A1A"/>
-                          </a:solidFill>
-                          <a:latin typeface="Microsoft YaHei"/>
-                          <a:ea typeface="Microsoft YaHei"/>
-                          <a:cs typeface="Microsoft YaHei"/>
-                        </a:rPr>
-                        <a:t>品牌方侧真实预算 / 审一条内容耗时</a:t>
+                        <a:rPr sz="1250" b="0">
+                          <a:solidFill>
+                            <a:srgbClr val="1A1A1A"/>
+                          </a:solidFill>
+                          <a:latin typeface="Microsoft YaHei"/>
+                          <a:ea typeface="Microsoft YaHei"/>
+                          <a:cs typeface="Microsoft YaHei"/>
+                        </a:rPr>
+                        <a:t>官网 9MB 数据文件（pptx）</a:t>
                       </a:r>
                     </a:p>
                   </a:txBody>
@@ -15310,15 +15514,15 @@
                     <a:p>
                       <a:pPr algn="ctr"/>
                       <a:r>
-                        <a:rPr sz="1300" b="0">
-                          <a:solidFill>
-                            <a:srgbClr val="1A1A1A"/>
-                          </a:solidFill>
-                          <a:latin typeface="Microsoft YaHei"/>
-                          <a:ea typeface="Microsoft YaHei"/>
-                          <a:cs typeface="Microsoft YaHei"/>
-                        </a:rPr>
-                        <a:t>只用了公开调研区间值</a:t>
+                        <a:rPr sz="1250" b="0">
+                          <a:solidFill>
+                            <a:srgbClr val="1A1A1A"/>
+                          </a:solidFill>
+                          <a:latin typeface="Microsoft YaHei"/>
+                          <a:ea typeface="Microsoft YaHei"/>
+                          <a:cs typeface="Microsoft YaHei"/>
+                        </a:rPr>
+                        <a:t>仍缺，需本人登录下载</a:t>
                       </a:r>
                     </a:p>
                   </a:txBody>
@@ -15335,123 +15539,21 @@
                     <a:p>
                       <a:pPr algn="ctr"/>
                       <a:r>
-                        <a:rPr sz="1300" b="0">
-                          <a:solidFill>
-                            <a:srgbClr val="1A1A1A"/>
-                          </a:solidFill>
-                          <a:latin typeface="Microsoft YaHei"/>
-                          <a:ea typeface="Microsoft YaHei"/>
-                          <a:cs typeface="Microsoft YaHei"/>
-                        </a:rPr>
-                        <a:t>商业数字从「估算」升到「可用」</a:t>
+                        <a:rPr sz="1250" b="0">
+                          <a:solidFill>
+                            <a:srgbClr val="1A1A1A"/>
+                          </a:solidFill>
+                          <a:latin typeface="Microsoft YaHei"/>
+                          <a:ea typeface="Microsoft YaHei"/>
+                          <a:cs typeface="Microsoft YaHei"/>
+                        </a:rPr>
+                        <a:t>官方要求并进方案，可能有隐藏评分点</a:t>
                       </a:r>
                     </a:p>
                   </a:txBody>
                   <a:tcPr marL="64008" marR="64008" marT="27432" marB="27432" anchor="ctr">
                     <a:solidFill>
                       <a:srgbClr val="FFFFFF"/>
-                    </a:solidFill>
-                  </a:tcPr>
-                </a:tc>
-              </a:tr>
-              <a:tr h="470268">
-                <a:tc>
-                  <a:txBody>
-                    <a:bodyPr wrap="square"/>
-                    <a:lstStyle/>
-                    <a:p>
-                      <a:pPr algn="l"/>
-                      <a:r>
-                        <a:rPr sz="1300" b="0">
-                          <a:solidFill>
-                            <a:srgbClr val="1A1A1A"/>
-                          </a:solidFill>
-                          <a:latin typeface="Microsoft YaHei"/>
-                          <a:ea typeface="Microsoft YaHei"/>
-                          <a:cs typeface="Microsoft YaHei"/>
-                        </a:rPr>
-                        <a:t>④</a:t>
-                      </a:r>
-                    </a:p>
-                  </a:txBody>
-                  <a:tcPr marL="64008" marR="64008" marT="27432" marB="27432" anchor="ctr">
-                    <a:solidFill>
-                      <a:srgbClr val="F4F1EC"/>
-                    </a:solidFill>
-                  </a:tcPr>
-                </a:tc>
-                <a:tc>
-                  <a:txBody>
-                    <a:bodyPr wrap="square"/>
-                    <a:lstStyle/>
-                    <a:p>
-                      <a:pPr algn="ctr"/>
-                      <a:r>
-                        <a:rPr sz="1300" b="0">
-                          <a:solidFill>
-                            <a:srgbClr val="1A1A1A"/>
-                          </a:solidFill>
-                          <a:latin typeface="Microsoft YaHei"/>
-                          <a:ea typeface="Microsoft YaHei"/>
-                          <a:cs typeface="Microsoft YaHei"/>
-                        </a:rPr>
-                        <a:t>官网 9MB 数据文件（pptx）</a:t>
-                      </a:r>
-                    </a:p>
-                  </a:txBody>
-                  <a:tcPr marL="64008" marR="64008" marT="27432" marB="27432" anchor="ctr">
-                    <a:solidFill>
-                      <a:srgbClr val="F4F1EC"/>
-                    </a:solidFill>
-                  </a:tcPr>
-                </a:tc>
-                <a:tc>
-                  <a:txBody>
-                    <a:bodyPr wrap="square"/>
-                    <a:lstStyle/>
-                    <a:p>
-                      <a:pPr algn="ctr"/>
-                      <a:r>
-                        <a:rPr sz="1300" b="0">
-                          <a:solidFill>
-                            <a:srgbClr val="1A1A1A"/>
-                          </a:solidFill>
-                          <a:latin typeface="Microsoft YaHei"/>
-                          <a:ea typeface="Microsoft YaHei"/>
-                          <a:cs typeface="Microsoft YaHei"/>
-                        </a:rPr>
-                        <a:t>需账号登录下载</a:t>
-                      </a:r>
-                    </a:p>
-                  </a:txBody>
-                  <a:tcPr marL="64008" marR="64008" marT="27432" marB="27432" anchor="ctr">
-                    <a:solidFill>
-                      <a:srgbClr val="F4F1EC"/>
-                    </a:solidFill>
-                  </a:tcPr>
-                </a:tc>
-                <a:tc>
-                  <a:txBody>
-                    <a:bodyPr wrap="square"/>
-                    <a:lstStyle/>
-                    <a:p>
-                      <a:pPr algn="ctr"/>
-                      <a:r>
-                        <a:rPr sz="1300" b="0">
-                          <a:solidFill>
-                            <a:srgbClr val="1A1A1A"/>
-                          </a:solidFill>
-                          <a:latin typeface="Microsoft YaHei"/>
-                          <a:ea typeface="Microsoft YaHei"/>
-                          <a:cs typeface="Microsoft YaHei"/>
-                        </a:rPr>
-                        <a:t>官方要求并进方案，可能有隐藏评分点</a:t>
-                      </a:r>
-                    </a:p>
-                  </a:txBody>
-                  <a:tcPr marL="64008" marR="64008" marT="27432" marB="27432" anchor="ctr">
-                    <a:solidFill>
-                      <a:srgbClr val="F4F1EC"/>
                     </a:solidFill>
                   </a:tcPr>
                 </a:tc>
@@ -15460,6 +15562,65 @@
           </a:graphicData>
         </a:graphic>
       </p:graphicFrame>
+      <p:sp>
+        <p:nvSpPr>
+          <p:cNvPr id="6" name="TextBox 5"/>
+          <p:cNvSpPr txBox="1"/>
+          <p:nvPr/>
+        </p:nvSpPr>
+        <p:spPr>
+          <a:xfrm>
+            <a:off x="457200" y="5943600"/>
+            <a:ext cx="11247120" cy="502920"/>
+          </a:xfrm>
+          <a:prstGeom prst="rect">
+            <a:avLst/>
+          </a:prstGeom>
+          <a:noFill/>
+        </p:spPr>
+        <p:txBody>
+          <a:bodyPr wrap="square" anchor="t" lIns="45720" rIns="45720" tIns="18288" bIns="18288">
+            <a:spAutoFit/>
+          </a:bodyPr>
+          <a:lstStyle/>
+          <a:p>
+            <a:pPr algn="l">
+              <a:lnSpc>
+                <a:spcPct val="125000"/>
+              </a:lnSpc>
+            </a:pPr>
+            <a:r>
+              <a:rPr sz="1200" b="0">
+                <a:solidFill>
+                  <a:srgbClr val="6B7280"/>
+                </a:solidFill>
+                <a:latin typeface="Microsoft YaHei"/>
+                <a:ea typeface="Microsoft YaHei"/>
+                <a:cs typeface="Microsoft YaHei"/>
+              </a:rPr>
+              <a:t>上面 4 项打 ✅ 的是本轮真正做完的；4 项打 ❌ 的是到提交前仍缺、我们选择照实写出来的 ——</a:t>
+            </a:r>
+          </a:p>
+          <a:p>
+            <a:pPr algn="l">
+              <a:lnSpc>
+                <a:spcPct val="125000"/>
+              </a:lnSpc>
+            </a:pPr>
+            <a:r>
+              <a:rPr sz="1200" b="0">
+                <a:solidFill>
+                  <a:srgbClr val="6B7280"/>
+                </a:solidFill>
+                <a:latin typeface="Microsoft YaHei"/>
+                <a:ea typeface="Microsoft YaHei"/>
+                <a:cs typeface="Microsoft YaHei"/>
+              </a:rPr>
+              <a:t>初赛材料里保留未完成项，比全部标绿更可信；这 4 项已同步进待补清单，不靠临时编造补齐。</a:t>
+            </a:r>
+          </a:p>
+        </p:txBody>
+      </p:sp>
     </p:spTree>
   </p:cSld>
   <p:clrMapOvr>
